--- a/ResQ_Presentation.pptx
+++ b/ResQ_Presentation.pptx
@@ -5,16 +5,18 @@
     <p:sldMasterId id="2147483648" r:id="rId1"/>
   </p:sldMasterIdLst>
   <p:sldIdLst>
-    <p:sldId id="256" r:id="rId7"/>
-    <p:sldId id="257" r:id="rId8"/>
-    <p:sldId id="258" r:id="rId9"/>
-    <p:sldId id="259" r:id="rId10"/>
-    <p:sldId id="260" r:id="rId11"/>
-    <p:sldId id="261" r:id="rId12"/>
-    <p:sldId id="262" r:id="rId13"/>
-    <p:sldId id="263" r:id="rId14"/>
+    <p:sldId id="291" r:id="rId2"/>
+    <p:sldId id="257" r:id="rId3"/>
+    <p:sldId id="258" r:id="rId4"/>
+    <p:sldId id="259" r:id="rId5"/>
+    <p:sldId id="260" r:id="rId6"/>
+    <p:sldId id="261" r:id="rId7"/>
+    <p:sldId id="292" r:id="rId8"/>
+    <p:sldId id="262" r:id="rId9"/>
+    <p:sldId id="263" r:id="rId10"/>
+    <p:sldId id="293" r:id="rId11"/>
   </p:sldIdLst>
-  <p:sldSz cx="12188952" cy="6858000" type="screen4x3"/>
+  <p:sldSz cx="12188825" cy="6858000"/>
   <p:notesSz cx="6858000" cy="9144000"/>
   <p:defaultTextStyle>
     <a:defPPr>
@@ -111,6 +113,22 @@
       </a:defRPr>
     </a:lvl9pPr>
   </p:defaultTextStyle>
+  <p:extLst>
+    <p:ext uri="{EFAFB233-063F-42B5-8137-9DF3F51BA10A}">
+      <p15:sldGuideLst xmlns:p15="http://schemas.microsoft.com/office/powerpoint/2012/main">
+        <p15:guide id="1" orient="horz" pos="2160">
+          <p15:clr>
+            <a:srgbClr val="A4A3A4"/>
+          </p15:clr>
+        </p15:guide>
+        <p15:guide id="2" pos="2880">
+          <p15:clr>
+            <a:srgbClr val="A4A3A4"/>
+          </p15:clr>
+        </p15:guide>
+      </p15:sldGuideLst>
+    </p:ext>
+  </p:extLst>
 </p:presentation>
 </file>
 
@@ -152,10 +170,9 @@
           <a:lstStyle/>
           <a:p>
             <a:r>
-              <a:rPr lang="en-US" smtClean="0"/>
+              <a:rPr lang="en-US"/>
               <a:t>Click to edit Master title style</a:t>
             </a:r>
-            <a:endParaRPr lang="en-US"/>
           </a:p>
         </p:txBody>
       </p:sp>
@@ -271,10 +288,9 @@
           </a:lstStyle>
           <a:p>
             <a:r>
-              <a:rPr lang="en-US" smtClean="0"/>
+              <a:rPr lang="en-US"/>
               <a:t>Click to edit Master subtitle style</a:t>
             </a:r>
-            <a:endParaRPr lang="en-US"/>
           </a:p>
         </p:txBody>
       </p:sp>
@@ -295,7 +311,7 @@
           <a:p>
             <a:fld id="{5BCAD085-E8A6-8845-BD4E-CB4CCA059FC4}" type="datetimeFigureOut">
               <a:rPr lang="en-US" smtClean="0"/>
-              <a:t>1/27/13</a:t>
+              <a:t>8/17/2026</a:t>
             </a:fld>
             <a:endParaRPr lang="en-US"/>
           </a:p>
@@ -389,10 +405,9 @@
           <a:lstStyle/>
           <a:p>
             <a:r>
-              <a:rPr lang="en-US" smtClean="0"/>
+              <a:rPr lang="en-US"/>
               <a:t>Click to edit Master title style</a:t>
             </a:r>
-            <a:endParaRPr lang="en-US"/>
           </a:p>
         </p:txBody>
       </p:sp>
@@ -413,38 +428,37 @@
           <a:p>
             <a:pPr lvl="0"/>
             <a:r>
-              <a:rPr lang="en-US" smtClean="0"/>
+              <a:rPr lang="en-US"/>
               <a:t>Click to edit Master text styles</a:t>
             </a:r>
           </a:p>
           <a:p>
             <a:pPr lvl="1"/>
             <a:r>
-              <a:rPr lang="en-US" smtClean="0"/>
+              <a:rPr lang="en-US"/>
               <a:t>Second level</a:t>
             </a:r>
           </a:p>
           <a:p>
             <a:pPr lvl="2"/>
             <a:r>
-              <a:rPr lang="en-US" smtClean="0"/>
+              <a:rPr lang="en-US"/>
               <a:t>Third level</a:t>
             </a:r>
           </a:p>
           <a:p>
             <a:pPr lvl="3"/>
             <a:r>
-              <a:rPr lang="en-US" smtClean="0"/>
+              <a:rPr lang="en-US"/>
               <a:t>Fourth level</a:t>
             </a:r>
           </a:p>
           <a:p>
             <a:pPr lvl="4"/>
             <a:r>
-              <a:rPr lang="en-US" smtClean="0"/>
+              <a:rPr lang="en-US"/>
               <a:t>Fifth level</a:t>
             </a:r>
-            <a:endParaRPr lang="en-US"/>
           </a:p>
         </p:txBody>
       </p:sp>
@@ -465,7 +479,7 @@
           <a:p>
             <a:fld id="{5BCAD085-E8A6-8845-BD4E-CB4CCA059FC4}" type="datetimeFigureOut">
               <a:rPr lang="en-US" smtClean="0"/>
-              <a:t>1/27/13</a:t>
+              <a:t>8/17/2026</a:t>
             </a:fld>
             <a:endParaRPr lang="en-US"/>
           </a:p>
@@ -564,10 +578,9 @@
           <a:lstStyle/>
           <a:p>
             <a:r>
-              <a:rPr lang="en-US" smtClean="0"/>
+              <a:rPr lang="en-US"/>
               <a:t>Click to edit Master title style</a:t>
             </a:r>
-            <a:endParaRPr lang="en-US"/>
           </a:p>
         </p:txBody>
       </p:sp>
@@ -593,38 +606,37 @@
           <a:p>
             <a:pPr lvl="0"/>
             <a:r>
-              <a:rPr lang="en-US" smtClean="0"/>
+              <a:rPr lang="en-US"/>
               <a:t>Click to edit Master text styles</a:t>
             </a:r>
           </a:p>
           <a:p>
             <a:pPr lvl="1"/>
             <a:r>
-              <a:rPr lang="en-US" smtClean="0"/>
+              <a:rPr lang="en-US"/>
               <a:t>Second level</a:t>
             </a:r>
           </a:p>
           <a:p>
             <a:pPr lvl="2"/>
             <a:r>
-              <a:rPr lang="en-US" smtClean="0"/>
+              <a:rPr lang="en-US"/>
               <a:t>Third level</a:t>
             </a:r>
           </a:p>
           <a:p>
             <a:pPr lvl="3"/>
             <a:r>
-              <a:rPr lang="en-US" smtClean="0"/>
+              <a:rPr lang="en-US"/>
               <a:t>Fourth level</a:t>
             </a:r>
           </a:p>
           <a:p>
             <a:pPr lvl="4"/>
             <a:r>
-              <a:rPr lang="en-US" smtClean="0"/>
+              <a:rPr lang="en-US"/>
               <a:t>Fifth level</a:t>
             </a:r>
-            <a:endParaRPr lang="en-US"/>
           </a:p>
         </p:txBody>
       </p:sp>
@@ -645,7 +657,7 @@
           <a:p>
             <a:fld id="{5BCAD085-E8A6-8845-BD4E-CB4CCA059FC4}" type="datetimeFigureOut">
               <a:rPr lang="en-US" smtClean="0"/>
-              <a:t>1/27/13</a:t>
+              <a:t>8/17/2026</a:t>
             </a:fld>
             <a:endParaRPr lang="en-US"/>
           </a:p>
@@ -739,10 +751,9 @@
           <a:lstStyle/>
           <a:p>
             <a:r>
-              <a:rPr lang="en-US" smtClean="0"/>
+              <a:rPr lang="en-US"/>
               <a:t>Click to edit Master title style</a:t>
             </a:r>
-            <a:endParaRPr lang="en-US"/>
           </a:p>
         </p:txBody>
       </p:sp>
@@ -763,38 +774,37 @@
           <a:p>
             <a:pPr lvl="0"/>
             <a:r>
-              <a:rPr lang="en-US" smtClean="0"/>
+              <a:rPr lang="en-US"/>
               <a:t>Click to edit Master text styles</a:t>
             </a:r>
           </a:p>
           <a:p>
             <a:pPr lvl="1"/>
             <a:r>
-              <a:rPr lang="en-US" smtClean="0"/>
+              <a:rPr lang="en-US"/>
               <a:t>Second level</a:t>
             </a:r>
           </a:p>
           <a:p>
             <a:pPr lvl="2"/>
             <a:r>
-              <a:rPr lang="en-US" smtClean="0"/>
+              <a:rPr lang="en-US"/>
               <a:t>Third level</a:t>
             </a:r>
           </a:p>
           <a:p>
             <a:pPr lvl="3"/>
             <a:r>
-              <a:rPr lang="en-US" smtClean="0"/>
+              <a:rPr lang="en-US"/>
               <a:t>Fourth level</a:t>
             </a:r>
           </a:p>
           <a:p>
             <a:pPr lvl="4"/>
             <a:r>
-              <a:rPr lang="en-US" smtClean="0"/>
+              <a:rPr lang="en-US"/>
               <a:t>Fifth level</a:t>
             </a:r>
-            <a:endParaRPr lang="en-US"/>
           </a:p>
         </p:txBody>
       </p:sp>
@@ -815,7 +825,7 @@
           <a:p>
             <a:fld id="{5BCAD085-E8A6-8845-BD4E-CB4CCA059FC4}" type="datetimeFigureOut">
               <a:rPr lang="en-US" smtClean="0"/>
-              <a:t>1/27/13</a:t>
+              <a:t>8/17/2026</a:t>
             </a:fld>
             <a:endParaRPr lang="en-US"/>
           </a:p>
@@ -918,10 +928,9 @@
           </a:lstStyle>
           <a:p>
             <a:r>
-              <a:rPr lang="en-US" smtClean="0"/>
+              <a:rPr lang="en-US"/>
               <a:t>Click to edit Master title style</a:t>
             </a:r>
-            <a:endParaRPr lang="en-US"/>
           </a:p>
         </p:txBody>
       </p:sp>
@@ -1038,7 +1047,7 @@
           <a:p>
             <a:pPr lvl="0"/>
             <a:r>
-              <a:rPr lang="en-US" smtClean="0"/>
+              <a:rPr lang="en-US"/>
               <a:t>Click to edit Master text styles</a:t>
             </a:r>
           </a:p>
@@ -1061,7 +1070,7 @@
           <a:p>
             <a:fld id="{5BCAD085-E8A6-8845-BD4E-CB4CCA059FC4}" type="datetimeFigureOut">
               <a:rPr lang="en-US" smtClean="0"/>
-              <a:t>1/27/13</a:t>
+              <a:t>8/17/2026</a:t>
             </a:fld>
             <a:endParaRPr lang="en-US"/>
           </a:p>
@@ -1155,10 +1164,9 @@
           <a:lstStyle/>
           <a:p>
             <a:r>
-              <a:rPr lang="en-US" smtClean="0"/>
+              <a:rPr lang="en-US"/>
               <a:t>Click to edit Master title style</a:t>
             </a:r>
-            <a:endParaRPr lang="en-US"/>
           </a:p>
         </p:txBody>
       </p:sp>
@@ -1212,38 +1220,37 @@
           <a:p>
             <a:pPr lvl="0"/>
             <a:r>
-              <a:rPr lang="en-US" smtClean="0"/>
+              <a:rPr lang="en-US"/>
               <a:t>Click to edit Master text styles</a:t>
             </a:r>
           </a:p>
           <a:p>
             <a:pPr lvl="1"/>
             <a:r>
-              <a:rPr lang="en-US" smtClean="0"/>
+              <a:rPr lang="en-US"/>
               <a:t>Second level</a:t>
             </a:r>
           </a:p>
           <a:p>
             <a:pPr lvl="2"/>
             <a:r>
-              <a:rPr lang="en-US" smtClean="0"/>
+              <a:rPr lang="en-US"/>
               <a:t>Third level</a:t>
             </a:r>
           </a:p>
           <a:p>
             <a:pPr lvl="3"/>
             <a:r>
-              <a:rPr lang="en-US" smtClean="0"/>
+              <a:rPr lang="en-US"/>
               <a:t>Fourth level</a:t>
             </a:r>
           </a:p>
           <a:p>
             <a:pPr lvl="4"/>
             <a:r>
-              <a:rPr lang="en-US" smtClean="0"/>
+              <a:rPr lang="en-US"/>
               <a:t>Fifth level</a:t>
             </a:r>
-            <a:endParaRPr lang="en-US"/>
           </a:p>
         </p:txBody>
       </p:sp>
@@ -1297,38 +1304,37 @@
           <a:p>
             <a:pPr lvl="0"/>
             <a:r>
-              <a:rPr lang="en-US" smtClean="0"/>
+              <a:rPr lang="en-US"/>
               <a:t>Click to edit Master text styles</a:t>
             </a:r>
           </a:p>
           <a:p>
             <a:pPr lvl="1"/>
             <a:r>
-              <a:rPr lang="en-US" smtClean="0"/>
+              <a:rPr lang="en-US"/>
               <a:t>Second level</a:t>
             </a:r>
           </a:p>
           <a:p>
             <a:pPr lvl="2"/>
             <a:r>
-              <a:rPr lang="en-US" smtClean="0"/>
+              <a:rPr lang="en-US"/>
               <a:t>Third level</a:t>
             </a:r>
           </a:p>
           <a:p>
             <a:pPr lvl="3"/>
             <a:r>
-              <a:rPr lang="en-US" smtClean="0"/>
+              <a:rPr lang="en-US"/>
               <a:t>Fourth level</a:t>
             </a:r>
           </a:p>
           <a:p>
             <a:pPr lvl="4"/>
             <a:r>
-              <a:rPr lang="en-US" smtClean="0"/>
+              <a:rPr lang="en-US"/>
               <a:t>Fifth level</a:t>
             </a:r>
-            <a:endParaRPr lang="en-US"/>
           </a:p>
         </p:txBody>
       </p:sp>
@@ -1349,7 +1355,7 @@
           <a:p>
             <a:fld id="{5BCAD085-E8A6-8845-BD4E-CB4CCA059FC4}" type="datetimeFigureOut">
               <a:rPr lang="en-US" smtClean="0"/>
-              <a:t>1/27/13</a:t>
+              <a:t>8/17/2026</a:t>
             </a:fld>
             <a:endParaRPr lang="en-US"/>
           </a:p>
@@ -1447,10 +1453,9 @@
           </a:lstStyle>
           <a:p>
             <a:r>
-              <a:rPr lang="en-US" smtClean="0"/>
+              <a:rPr lang="en-US"/>
               <a:t>Click to edit Master title style</a:t>
             </a:r>
-            <a:endParaRPr lang="en-US"/>
           </a:p>
         </p:txBody>
       </p:sp>
@@ -1513,7 +1518,7 @@
           <a:p>
             <a:pPr lvl="0"/>
             <a:r>
-              <a:rPr lang="en-US" smtClean="0"/>
+              <a:rPr lang="en-US"/>
               <a:t>Click to edit Master text styles</a:t>
             </a:r>
           </a:p>
@@ -1569,38 +1574,37 @@
           <a:p>
             <a:pPr lvl="0"/>
             <a:r>
-              <a:rPr lang="en-US" smtClean="0"/>
+              <a:rPr lang="en-US"/>
               <a:t>Click to edit Master text styles</a:t>
             </a:r>
           </a:p>
           <a:p>
             <a:pPr lvl="1"/>
             <a:r>
-              <a:rPr lang="en-US" smtClean="0"/>
+              <a:rPr lang="en-US"/>
               <a:t>Second level</a:t>
             </a:r>
           </a:p>
           <a:p>
             <a:pPr lvl="2"/>
             <a:r>
-              <a:rPr lang="en-US" smtClean="0"/>
+              <a:rPr lang="en-US"/>
               <a:t>Third level</a:t>
             </a:r>
           </a:p>
           <a:p>
             <a:pPr lvl="3"/>
             <a:r>
-              <a:rPr lang="en-US" smtClean="0"/>
+              <a:rPr lang="en-US"/>
               <a:t>Fourth level</a:t>
             </a:r>
           </a:p>
           <a:p>
             <a:pPr lvl="4"/>
             <a:r>
-              <a:rPr lang="en-US" smtClean="0"/>
+              <a:rPr lang="en-US"/>
               <a:t>Fifth level</a:t>
             </a:r>
-            <a:endParaRPr lang="en-US"/>
           </a:p>
         </p:txBody>
       </p:sp>
@@ -1663,7 +1667,7 @@
           <a:p>
             <a:pPr lvl="0"/>
             <a:r>
-              <a:rPr lang="en-US" smtClean="0"/>
+              <a:rPr lang="en-US"/>
               <a:t>Click to edit Master text styles</a:t>
             </a:r>
           </a:p>
@@ -1719,38 +1723,37 @@
           <a:p>
             <a:pPr lvl="0"/>
             <a:r>
-              <a:rPr lang="en-US" smtClean="0"/>
+              <a:rPr lang="en-US"/>
               <a:t>Click to edit Master text styles</a:t>
             </a:r>
           </a:p>
           <a:p>
             <a:pPr lvl="1"/>
             <a:r>
-              <a:rPr lang="en-US" smtClean="0"/>
+              <a:rPr lang="en-US"/>
               <a:t>Second level</a:t>
             </a:r>
           </a:p>
           <a:p>
             <a:pPr lvl="2"/>
             <a:r>
-              <a:rPr lang="en-US" smtClean="0"/>
+              <a:rPr lang="en-US"/>
               <a:t>Third level</a:t>
             </a:r>
           </a:p>
           <a:p>
             <a:pPr lvl="3"/>
             <a:r>
-              <a:rPr lang="en-US" smtClean="0"/>
+              <a:rPr lang="en-US"/>
               <a:t>Fourth level</a:t>
             </a:r>
           </a:p>
           <a:p>
             <a:pPr lvl="4"/>
             <a:r>
-              <a:rPr lang="en-US" smtClean="0"/>
+              <a:rPr lang="en-US"/>
               <a:t>Fifth level</a:t>
             </a:r>
-            <a:endParaRPr lang="en-US"/>
           </a:p>
         </p:txBody>
       </p:sp>
@@ -1771,7 +1774,7 @@
           <a:p>
             <a:fld id="{5BCAD085-E8A6-8845-BD4E-CB4CCA059FC4}" type="datetimeFigureOut">
               <a:rPr lang="en-US" smtClean="0"/>
-              <a:t>1/27/13</a:t>
+              <a:t>8/17/2026</a:t>
             </a:fld>
             <a:endParaRPr lang="en-US"/>
           </a:p>
@@ -1865,10 +1868,9 @@
           <a:lstStyle/>
           <a:p>
             <a:r>
-              <a:rPr lang="en-US" smtClean="0"/>
+              <a:rPr lang="en-US"/>
               <a:t>Click to edit Master title style</a:t>
             </a:r>
-            <a:endParaRPr lang="en-US"/>
           </a:p>
         </p:txBody>
       </p:sp>
@@ -1889,7 +1891,7 @@
           <a:p>
             <a:fld id="{5BCAD085-E8A6-8845-BD4E-CB4CCA059FC4}" type="datetimeFigureOut">
               <a:rPr lang="en-US" smtClean="0"/>
-              <a:t>1/27/13</a:t>
+              <a:t>8/17/2026</a:t>
             </a:fld>
             <a:endParaRPr lang="en-US"/>
           </a:p>
@@ -1984,7 +1986,7 @@
           <a:p>
             <a:fld id="{5BCAD085-E8A6-8845-BD4E-CB4CCA059FC4}" type="datetimeFigureOut">
               <a:rPr lang="en-US" smtClean="0"/>
-              <a:t>1/27/13</a:t>
+              <a:t>8/17/2026</a:t>
             </a:fld>
             <a:endParaRPr lang="en-US"/>
           </a:p>
@@ -2087,10 +2089,9 @@
           </a:lstStyle>
           <a:p>
             <a:r>
-              <a:rPr lang="en-US" smtClean="0"/>
+              <a:rPr lang="en-US"/>
               <a:t>Click to edit Master title style</a:t>
             </a:r>
-            <a:endParaRPr lang="en-US"/>
           </a:p>
         </p:txBody>
       </p:sp>
@@ -2144,38 +2145,37 @@
           <a:p>
             <a:pPr lvl="0"/>
             <a:r>
-              <a:rPr lang="en-US" smtClean="0"/>
+              <a:rPr lang="en-US"/>
               <a:t>Click to edit Master text styles</a:t>
             </a:r>
           </a:p>
           <a:p>
             <a:pPr lvl="1"/>
             <a:r>
-              <a:rPr lang="en-US" smtClean="0"/>
+              <a:rPr lang="en-US"/>
               <a:t>Second level</a:t>
             </a:r>
           </a:p>
           <a:p>
             <a:pPr lvl="2"/>
             <a:r>
-              <a:rPr lang="en-US" smtClean="0"/>
+              <a:rPr lang="en-US"/>
               <a:t>Third level</a:t>
             </a:r>
           </a:p>
           <a:p>
             <a:pPr lvl="3"/>
             <a:r>
-              <a:rPr lang="en-US" smtClean="0"/>
+              <a:rPr lang="en-US"/>
               <a:t>Fourth level</a:t>
             </a:r>
           </a:p>
           <a:p>
             <a:pPr lvl="4"/>
             <a:r>
-              <a:rPr lang="en-US" smtClean="0"/>
+              <a:rPr lang="en-US"/>
               <a:t>Fifth level</a:t>
             </a:r>
-            <a:endParaRPr lang="en-US"/>
           </a:p>
         </p:txBody>
       </p:sp>
@@ -2238,7 +2238,7 @@
           <a:p>
             <a:pPr lvl="0"/>
             <a:r>
-              <a:rPr lang="en-US" smtClean="0"/>
+              <a:rPr lang="en-US"/>
               <a:t>Click to edit Master text styles</a:t>
             </a:r>
           </a:p>
@@ -2261,7 +2261,7 @@
           <a:p>
             <a:fld id="{5BCAD085-E8A6-8845-BD4E-CB4CCA059FC4}" type="datetimeFigureOut">
               <a:rPr lang="en-US" smtClean="0"/>
-              <a:t>1/27/13</a:t>
+              <a:t>8/17/2026</a:t>
             </a:fld>
             <a:endParaRPr lang="en-US"/>
           </a:p>
@@ -2364,10 +2364,9 @@
           </a:lstStyle>
           <a:p>
             <a:r>
-              <a:rPr lang="en-US" smtClean="0"/>
+              <a:rPr lang="en-US"/>
               <a:t>Click to edit Master title style</a:t>
             </a:r>
-            <a:endParaRPr lang="en-US"/>
           </a:p>
         </p:txBody>
       </p:sp>
@@ -2491,7 +2490,7 @@
           <a:p>
             <a:pPr lvl="0"/>
             <a:r>
-              <a:rPr lang="en-US" smtClean="0"/>
+              <a:rPr lang="en-US"/>
               <a:t>Click to edit Master text styles</a:t>
             </a:r>
           </a:p>
@@ -2514,7 +2513,7 @@
           <a:p>
             <a:fld id="{5BCAD085-E8A6-8845-BD4E-CB4CCA059FC4}" type="datetimeFigureOut">
               <a:rPr lang="en-US" smtClean="0"/>
-              <a:t>1/27/13</a:t>
+              <a:t>8/17/2026</a:t>
             </a:fld>
             <a:endParaRPr lang="en-US"/>
           </a:p>
@@ -2623,10 +2622,9 @@
           <a:lstStyle/>
           <a:p>
             <a:r>
-              <a:rPr lang="en-US" smtClean="0"/>
+              <a:rPr lang="en-US"/>
               <a:t>Click to edit Master title style</a:t>
             </a:r>
-            <a:endParaRPr lang="en-US"/>
           </a:p>
         </p:txBody>
       </p:sp>
@@ -2657,38 +2655,37 @@
           <a:p>
             <a:pPr lvl="0"/>
             <a:r>
-              <a:rPr lang="en-US" smtClean="0"/>
+              <a:rPr lang="en-US"/>
               <a:t>Click to edit Master text styles</a:t>
             </a:r>
           </a:p>
           <a:p>
             <a:pPr lvl="1"/>
             <a:r>
-              <a:rPr lang="en-US" smtClean="0"/>
+              <a:rPr lang="en-US"/>
               <a:t>Second level</a:t>
             </a:r>
           </a:p>
           <a:p>
             <a:pPr lvl="2"/>
             <a:r>
-              <a:rPr lang="en-US" smtClean="0"/>
+              <a:rPr lang="en-US"/>
               <a:t>Third level</a:t>
             </a:r>
           </a:p>
           <a:p>
             <a:pPr lvl="3"/>
             <a:r>
-              <a:rPr lang="en-US" smtClean="0"/>
+              <a:rPr lang="en-US"/>
               <a:t>Fourth level</a:t>
             </a:r>
           </a:p>
           <a:p>
             <a:pPr lvl="4"/>
             <a:r>
-              <a:rPr lang="en-US" smtClean="0"/>
+              <a:rPr lang="en-US"/>
               <a:t>Fifth level</a:t>
             </a:r>
-            <a:endParaRPr lang="en-US"/>
           </a:p>
         </p:txBody>
       </p:sp>
@@ -2727,7 +2724,7 @@
           <a:p>
             <a:fld id="{5BCAD085-E8A6-8845-BD4E-CB4CCA059FC4}" type="datetimeFigureOut">
               <a:rPr lang="en-US" smtClean="0"/>
-              <a:t>1/27/13</a:t>
+              <a:t>8/17/2026</a:t>
             </a:fld>
             <a:endParaRPr lang="en-US"/>
           </a:p>
@@ -3086,7 +3083,7 @@
 </file>
 
 <file path=ppt/slides/slide1.xml><?xml version="1.0" encoding="utf-8"?>
-<p:sld xmlns:a="http://schemas.openxmlformats.org/drawingml/2006/main" xmlns:p="http://schemas.openxmlformats.org/presentationml/2006/main" xmlns:r="http://schemas.openxmlformats.org/officeDocument/2006/relationships">
+<p:sld xmlns:a="http://schemas.openxmlformats.org/drawingml/2006/main" xmlns:r="http://schemas.openxmlformats.org/officeDocument/2006/relationships" xmlns:p="http://schemas.openxmlformats.org/presentationml/2006/main">
   <p:cSld>
     <p:spTree>
       <p:nvGrpSpPr>
@@ -3094,7 +3091,275 @@
         <p:cNvGrpSpPr/>
         <p:nvPr/>
       </p:nvGrpSpPr>
-      <p:grpSpPr/>
+      <p:grpSpPr>
+        <a:xfrm>
+          <a:off x="0" y="0"/>
+          <a:ext cx="0" cy="0"/>
+          <a:chOff x="0" y="0"/>
+          <a:chExt cx="0" cy="0"/>
+        </a:xfrm>
+      </p:grpSpPr>
+      <p:pic>
+        <p:nvPicPr>
+          <p:cNvPr id="5" name="Picture 4">
+            <a:extLst>
+              <a:ext uri="{FF2B5EF4-FFF2-40B4-BE49-F238E27FC236}">
+                <a16:creationId xmlns:a16="http://schemas.microsoft.com/office/drawing/2014/main" id="{9120848B-B2B4-45BE-A961-AEC0B06CF41B}"/>
+              </a:ext>
+            </a:extLst>
+          </p:cNvPr>
+          <p:cNvPicPr>
+            <a:picLocks noChangeAspect="1"/>
+          </p:cNvPicPr>
+          <p:nvPr/>
+        </p:nvPicPr>
+        <p:blipFill rotWithShape="1">
+          <a:blip r:embed="rId2"/>
+          <a:srcRect r="59916"/>
+          <a:stretch/>
+        </p:blipFill>
+        <p:spPr>
+          <a:xfrm>
+            <a:off x="7904657" y="2076803"/>
+            <a:ext cx="3202675" cy="3425345"/>
+          </a:xfrm>
+          <a:prstGeom prst="rect">
+            <a:avLst/>
+          </a:prstGeom>
+        </p:spPr>
+      </p:pic>
+      <p:sp>
+        <p:nvSpPr>
+          <p:cNvPr id="4" name="Subtitle 3"/>
+          <p:cNvSpPr>
+            <a:spLocks noGrp="1"/>
+          </p:cNvSpPr>
+          <p:nvPr>
+            <p:ph type="subTitle" idx="1"/>
+          </p:nvPr>
+        </p:nvSpPr>
+        <p:spPr>
+          <a:xfrm>
+            <a:off x="0" y="2076802"/>
+            <a:ext cx="1329267" cy="324679"/>
+          </a:xfrm>
+        </p:spPr>
+        <p:txBody>
+          <a:bodyPr>
+            <a:normAutofit fontScale="55000" lnSpcReduction="20000"/>
+          </a:bodyPr>
+          <a:lstStyle/>
+          <a:p>
+            <a:endParaRPr lang="en-US" b="1" dirty="0">
+              <a:solidFill>
+                <a:schemeClr val="tx1"/>
+              </a:solidFill>
+              <a:latin typeface="Times New Roman" panose="02020603050405020304" pitchFamily="18" charset="0"/>
+              <a:cs typeface="Times New Roman" panose="02020603050405020304" pitchFamily="18" charset="0"/>
+            </a:endParaRPr>
+          </a:p>
+          <a:p>
+            <a:endParaRPr lang="en-US" b="1" dirty="0">
+              <a:solidFill>
+                <a:schemeClr val="tx1"/>
+              </a:solidFill>
+              <a:latin typeface="Times New Roman" panose="02020603050405020304" pitchFamily="18" charset="0"/>
+              <a:cs typeface="Times New Roman" panose="02020603050405020304" pitchFamily="18" charset="0"/>
+            </a:endParaRPr>
+          </a:p>
+          <a:p>
+            <a:endParaRPr lang="en-US" b="1" dirty="0">
+              <a:solidFill>
+                <a:schemeClr val="tx1"/>
+              </a:solidFill>
+              <a:latin typeface="Times New Roman" panose="02020603050405020304" pitchFamily="18" charset="0"/>
+              <a:cs typeface="Times New Roman" panose="02020603050405020304" pitchFamily="18" charset="0"/>
+            </a:endParaRPr>
+          </a:p>
+          <a:p>
+            <a:endParaRPr lang="en-IN" b="1" dirty="0">
+              <a:solidFill>
+                <a:schemeClr val="tx1"/>
+              </a:solidFill>
+              <a:latin typeface="Times New Roman" panose="02020603050405020304" pitchFamily="18" charset="0"/>
+              <a:cs typeface="Times New Roman" panose="02020603050405020304" pitchFamily="18" charset="0"/>
+            </a:endParaRPr>
+          </a:p>
+        </p:txBody>
+      </p:sp>
+      <p:sp>
+        <p:nvSpPr>
+          <p:cNvPr id="8" name="Title 7"/>
+          <p:cNvSpPr>
+            <a:spLocks noGrp="1"/>
+          </p:cNvSpPr>
+          <p:nvPr>
+            <p:ph type="ctrTitle"/>
+          </p:nvPr>
+        </p:nvSpPr>
+        <p:spPr>
+          <a:xfrm>
+            <a:off x="974665" y="-107752"/>
+            <a:ext cx="10360501" cy="2927208"/>
+          </a:xfrm>
+        </p:spPr>
+        <p:txBody>
+          <a:bodyPr/>
+          <a:lstStyle/>
+          <a:p>
+            <a:r>
+              <a:rPr lang="en-US" sz="3999" b="1" dirty="0">
+                <a:solidFill>
+                  <a:schemeClr val="tx2"/>
+                </a:solidFill>
+                <a:latin typeface="Garamond" panose="02020404030301010803" pitchFamily="18" charset="0"/>
+              </a:rPr>
+              <a:t>SMART INDIA HACKATHON 2026</a:t>
+            </a:r>
+            <a:endParaRPr lang="en-IN" sz="3999" b="1" dirty="0">
+              <a:solidFill>
+                <a:schemeClr val="tx2"/>
+              </a:solidFill>
+              <a:latin typeface="Garamond" panose="02020404030301010803" pitchFamily="18" charset="0"/>
+            </a:endParaRPr>
+          </a:p>
+        </p:txBody>
+      </p:sp>
+      <p:sp>
+        <p:nvSpPr>
+          <p:cNvPr id="10" name="TextBox 9"/>
+          <p:cNvSpPr txBox="1"/>
+          <p:nvPr/>
+        </p:nvSpPr>
+        <p:spPr>
+          <a:xfrm>
+            <a:off x="331199" y="2076803"/>
+            <a:ext cx="6950134" cy="2887650"/>
+          </a:xfrm>
+          <a:prstGeom prst="rect">
+            <a:avLst/>
+          </a:prstGeom>
+          <a:noFill/>
+        </p:spPr>
+        <p:txBody>
+          <a:bodyPr wrap="square" rtlCol="0">
+            <a:spAutoFit/>
+          </a:bodyPr>
+          <a:lstStyle/>
+          <a:p>
+            <a:endParaRPr lang="en-US" sz="1799" dirty="0"/>
+          </a:p>
+          <a:p>
+            <a:pPr marL="285664" indent="-285664" algn="just">
+              <a:lnSpc>
+                <a:spcPct val="200000"/>
+              </a:lnSpc>
+              <a:buFont typeface="Arial" panose="020B0604020202020204" pitchFamily="34" charset="0"/>
+              <a:buChar char="•"/>
+            </a:pPr>
+            <a:r>
+              <a:rPr lang="en-US" sz="1400" b="1" dirty="0">
+                <a:latin typeface="Arial" panose="020B0604020202020204" pitchFamily="34" charset="0"/>
+                <a:cs typeface="Arial" panose="020B0604020202020204" pitchFamily="34" charset="0"/>
+              </a:rPr>
+              <a:t>Problem Statement Title- Smart Ambulance Route Optimization &amp; Hospital Pre-Admission</a:t>
+            </a:r>
+          </a:p>
+          <a:p>
+            <a:pPr marL="285664" indent="-285664" algn="just">
+              <a:lnSpc>
+                <a:spcPct val="200000"/>
+              </a:lnSpc>
+              <a:buFont typeface="Arial" panose="020B0604020202020204" pitchFamily="34" charset="0"/>
+              <a:buChar char="•"/>
+            </a:pPr>
+            <a:r>
+              <a:rPr lang="en-US" sz="1400" b="1" dirty="0">
+                <a:latin typeface="Arial" panose="020B0604020202020204" pitchFamily="34" charset="0"/>
+                <a:cs typeface="Arial" panose="020B0604020202020204" pitchFamily="34" charset="0"/>
+              </a:rPr>
+              <a:t>Theme- Transportation &amp; Logistics / MedTech</a:t>
+            </a:r>
+          </a:p>
+          <a:p>
+            <a:pPr marL="285664" indent="-285664" algn="just">
+              <a:lnSpc>
+                <a:spcPct val="200000"/>
+              </a:lnSpc>
+              <a:buFont typeface="Arial" panose="020B0604020202020204" pitchFamily="34" charset="0"/>
+              <a:buChar char="•"/>
+            </a:pPr>
+            <a:r>
+              <a:rPr lang="en-US" sz="1400" b="1" dirty="0">
+                <a:latin typeface="Arial" panose="020B0604020202020204" pitchFamily="34" charset="0"/>
+                <a:cs typeface="Arial" panose="020B0604020202020204" pitchFamily="34" charset="0"/>
+              </a:rPr>
+              <a:t>PS Category- Software</a:t>
+            </a:r>
+          </a:p>
+          <a:p>
+            <a:pPr marL="285664" indent="-285664" algn="just">
+              <a:lnSpc>
+                <a:spcPct val="200000"/>
+              </a:lnSpc>
+              <a:buFont typeface="Arial" panose="020B0604020202020204" pitchFamily="34" charset="0"/>
+              <a:buChar char="•"/>
+            </a:pPr>
+            <a:r>
+              <a:rPr lang="en-US" sz="1400" b="1" dirty="0">
+                <a:latin typeface="Arial" panose="020B0604020202020204" pitchFamily="34" charset="0"/>
+                <a:cs typeface="Arial" panose="020B0604020202020204" pitchFamily="34" charset="0"/>
+              </a:rPr>
+              <a:t>Team ID- [Fill from SIH Portal]</a:t>
+            </a:r>
+          </a:p>
+          <a:p>
+            <a:pPr marL="285664" indent="-285664" algn="just">
+              <a:lnSpc>
+                <a:spcPct val="200000"/>
+              </a:lnSpc>
+              <a:buFont typeface="Arial" panose="020B0604020202020204" pitchFamily="34" charset="0"/>
+              <a:buChar char="•"/>
+            </a:pPr>
+            <a:r>
+              <a:rPr lang="en-US" sz="1400" b="1" dirty="0">
+                <a:latin typeface="Arial" panose="020B0604020202020204" pitchFamily="34" charset="0"/>
+                <a:cs typeface="Arial" panose="020B0604020202020204" pitchFamily="34" charset="0"/>
+              </a:rPr>
+              <a:t>Team Name- BYTE BUSTERS</a:t>
+            </a:r>
+            <a:endParaRPr lang="en-IN" sz="1400" b="1" dirty="0">
+              <a:latin typeface="Arial" panose="020B0604020202020204" pitchFamily="34" charset="0"/>
+              <a:cs typeface="Arial" panose="020B0604020202020204" pitchFamily="34" charset="0"/>
+            </a:endParaRPr>
+          </a:p>
+        </p:txBody>
+      </p:sp>
+    </p:spTree>
+  </p:cSld>
+  <p:clrMapOvr>
+    <a:masterClrMapping/>
+  </p:clrMapOvr>
+</p:sld>
+</file>
+
+<file path=ppt/slides/slide10.xml><?xml version="1.0" encoding="utf-8"?>
+<p:sld xmlns:a="http://schemas.openxmlformats.org/drawingml/2006/main" xmlns:r="http://schemas.openxmlformats.org/officeDocument/2006/relationships" xmlns:p="http://schemas.openxmlformats.org/presentationml/2006/main">
+  <p:cSld>
+    <p:spTree>
+      <p:nvGrpSpPr>
+        <p:cNvPr id="1" name=""/>
+        <p:cNvGrpSpPr/>
+        <p:nvPr/>
+      </p:nvGrpSpPr>
+      <p:grpSpPr>
+        <a:xfrm>
+          <a:off x="0" y="0"/>
+          <a:ext cx="0" cy="0"/>
+          <a:chOff x="0" y="0"/>
+          <a:chExt cx="0" cy="0"/>
+        </a:xfrm>
+      </p:grpSpPr>
       <p:sp>
         <p:nvSpPr>
           <p:cNvPr id="2" name="Rectangle 1"/>
@@ -3110,7 +3375,7 @@
             <a:avLst/>
           </a:prstGeom>
           <a:solidFill>
-            <a:srgbClr val="1A1A2E"/>
+            <a:srgbClr val="FFFFFF"/>
           </a:solidFill>
           <a:ln>
             <a:noFill/>
@@ -3135,6 +3400,7 @@
           <a:lstStyle/>
           <a:p>
             <a:pPr algn="ctr"/>
+            <a:endParaRPr/>
           </a:p>
         </p:txBody>
       </p:sp>
@@ -3147,7 +3413,7 @@
         <p:spPr>
           <a:xfrm>
             <a:off x="0" y="0"/>
-            <a:ext cx="12188952" cy="109728"/>
+            <a:ext cx="12188952" cy="73152"/>
           </a:xfrm>
           <a:prstGeom prst="rect">
             <a:avLst/>
@@ -3178,6 +3444,7 @@
           <a:lstStyle/>
           <a:p>
             <a:pPr algn="ctr"/>
+            <a:endParaRPr/>
           </a:p>
         </p:txBody>
       </p:sp>
@@ -3189,8 +3456,8 @@
         </p:nvSpPr>
         <p:spPr>
           <a:xfrm>
-            <a:off x="0" y="6748272"/>
-            <a:ext cx="12188952" cy="109728"/>
+            <a:off x="0" y="6784848"/>
+            <a:ext cx="12188952" cy="73152"/>
           </a:xfrm>
           <a:prstGeom prst="rect">
             <a:avLst/>
@@ -3221,19 +3488,64 @@
           <a:lstStyle/>
           <a:p>
             <a:pPr algn="ctr"/>
-          </a:p>
-        </p:txBody>
-      </p:sp>
-      <p:sp>
-        <p:nvSpPr>
-          <p:cNvPr id="5" name="TextBox 4"/>
+            <a:endParaRPr/>
+          </a:p>
+        </p:txBody>
+      </p:sp>
+      <p:sp>
+        <p:nvSpPr>
+          <p:cNvPr id="5" name="Rectangle 4"/>
+          <p:cNvSpPr/>
+          <p:nvPr/>
+        </p:nvSpPr>
+        <p:spPr>
+          <a:xfrm>
+            <a:off x="1500000" y="1800000"/>
+            <a:ext cx="9188952" cy="3200000"/>
+          </a:xfrm>
+          <a:prstGeom prst="rect">
+            <a:avLst/>
+          </a:prstGeom>
+          <a:solidFill>
+            <a:srgbClr val="CC0000"/>
+          </a:solidFill>
+          <a:ln>
+            <a:noFill/>
+          </a:ln>
+        </p:spPr>
+        <p:style>
+          <a:lnRef idx="1">
+            <a:schemeClr val="accent1"/>
+          </a:lnRef>
+          <a:fillRef idx="3">
+            <a:schemeClr val="accent1"/>
+          </a:fillRef>
+          <a:effectRef idx="2">
+            <a:schemeClr val="accent1"/>
+          </a:effectRef>
+          <a:fontRef idx="minor">
+            <a:schemeClr val="lt1"/>
+          </a:fontRef>
+        </p:style>
+        <p:txBody>
+          <a:bodyPr rtlCol="0" anchor="ctr"/>
+          <a:lstStyle/>
+          <a:p>
+            <a:pPr algn="ctr"/>
+            <a:endParaRPr/>
+          </a:p>
+        </p:txBody>
+      </p:sp>
+      <p:sp>
+        <p:nvSpPr>
+          <p:cNvPr id="6" name="TextBox 5"/>
           <p:cNvSpPr txBox="1"/>
           <p:nvPr/>
         </p:nvSpPr>
         <p:spPr>
           <a:xfrm>
-            <a:off x="914400" y="1645920"/>
-            <a:ext cx="10360152" cy="1280160"/>
+            <a:off x="1500000" y="2100000"/>
+            <a:ext cx="9188952" cy="1400000"/>
           </a:xfrm>
           <a:prstGeom prst="rect">
             <a:avLst/>
@@ -3252,23 +3564,22 @@
                 <a:solidFill>
                   <a:srgbClr val="FFFFFF"/>
                 </a:solidFill>
-                <a:latin typeface="Calibri"/>
-              </a:rPr>
-              <a:t>ResQ</a:t>
-            </a:r>
-          </a:p>
-        </p:txBody>
-      </p:sp>
-      <p:sp>
-        <p:nvSpPr>
-          <p:cNvPr id="6" name="TextBox 5"/>
+              </a:rPr>
+              <a:t>Thank You</a:t>
+            </a:r>
+          </a:p>
+        </p:txBody>
+      </p:sp>
+      <p:sp>
+        <p:nvSpPr>
+          <p:cNvPr id="7" name="TextBox 6"/>
           <p:cNvSpPr txBox="1"/>
           <p:nvPr/>
         </p:nvSpPr>
         <p:spPr>
           <a:xfrm>
-            <a:off x="914400" y="3108960"/>
-            <a:ext cx="10360152" cy="914400"/>
+            <a:off x="1500000" y="3300000"/>
+            <a:ext cx="9188952" cy="500000"/>
           </a:xfrm>
           <a:prstGeom prst="rect">
             <a:avLst/>
@@ -3283,27 +3594,26 @@
           <a:p>
             <a:pPr algn="ctr"/>
             <a:r>
-              <a:rPr sz="2400" b="0">
-                <a:solidFill>
-                  <a:srgbClr val="CCCCCC"/>
-                </a:solidFill>
-                <a:latin typeface="Calibri"/>
-              </a:rPr>
-              <a:t>Smart Ambulance Route Optimization &amp; Hospital Pre-Admission</a:t>
-            </a:r>
-          </a:p>
-        </p:txBody>
-      </p:sp>
-      <p:sp>
-        <p:nvSpPr>
-          <p:cNvPr id="7" name="TextBox 6"/>
+              <a:rPr sz="2000" b="0">
+                <a:solidFill>
+                  <a:srgbClr val="FFFFFF"/>
+                </a:solidFill>
+              </a:rPr>
+              <a:t>Team BYTE BUSTERS — Smart India Hackathon 2026</a:t>
+            </a:r>
+          </a:p>
+        </p:txBody>
+      </p:sp>
+      <p:sp>
+        <p:nvSpPr>
+          <p:cNvPr id="8" name="TextBox 7"/>
           <p:cNvSpPr txBox="1"/>
           <p:nvPr/>
         </p:nvSpPr>
         <p:spPr>
           <a:xfrm>
-            <a:off x="914400" y="4206240"/>
-            <a:ext cx="10360152" cy="548640"/>
+            <a:off x="1500000" y="5200000"/>
+            <a:ext cx="9188952" cy="400000"/>
           </a:xfrm>
           <a:prstGeom prst="rect">
             <a:avLst/>
@@ -3320,18 +3630,17 @@
             <a:r>
               <a:rPr sz="1800" b="0">
                 <a:solidFill>
-                  <a:srgbClr val="999999"/>
-                </a:solidFill>
-                <a:latin typeface="Calibri"/>
-              </a:rPr>
-              <a:t>Smart India Hackathon 2026</a:t>
-            </a:r>
-          </a:p>
-        </p:txBody>
-      </p:sp>
-      <p:sp>
-        <p:nvSpPr>
-          <p:cNvPr id="8" name="TextBox 7"/>
+                  <a:srgbClr val="1A1A2E"/>
+                </a:solidFill>
+              </a:rPr>
+              <a:t>ResQ — Every Second Counts</a:t>
+            </a:r>
+          </a:p>
+        </p:txBody>
+      </p:sp>
+      <p:sp>
+        <p:nvSpPr>
+          <p:cNvPr id="9" name="TextBox 8"/>
           <p:cNvSpPr txBox="1"/>
           <p:nvPr/>
         </p:nvSpPr>
@@ -3355,11 +3664,10 @@
             <a:r>
               <a:rPr sz="1000" b="0">
                 <a:solidFill>
-                  <a:srgbClr val="666666"/>
-                </a:solidFill>
-                <a:latin typeface="Calibri"/>
-              </a:rPr>
-              <a:t>1 / 8</a:t>
+                  <a:srgbClr val="999999"/>
+                </a:solidFill>
+              </a:rPr>
+              <a:t>10 / 10</a:t>
             </a:r>
           </a:p>
         </p:txBody>
@@ -3373,7 +3681,7 @@
 </file>
 
 <file path=ppt/slides/slide2.xml><?xml version="1.0" encoding="utf-8"?>
-<p:sld xmlns:a="http://schemas.openxmlformats.org/drawingml/2006/main" xmlns:p="http://schemas.openxmlformats.org/presentationml/2006/main" xmlns:r="http://schemas.openxmlformats.org/officeDocument/2006/relationships">
+<p:sld xmlns:a="http://schemas.openxmlformats.org/drawingml/2006/main" xmlns:r="http://schemas.openxmlformats.org/officeDocument/2006/relationships" xmlns:p="http://schemas.openxmlformats.org/presentationml/2006/main">
   <p:cSld>
     <p:spTree>
       <p:nvGrpSpPr>
@@ -3381,7 +3689,14 @@
         <p:cNvGrpSpPr/>
         <p:nvPr/>
       </p:nvGrpSpPr>
-      <p:grpSpPr/>
+      <p:grpSpPr>
+        <a:xfrm>
+          <a:off x="0" y="0"/>
+          <a:ext cx="0" cy="0"/>
+          <a:chOff x="0" y="0"/>
+          <a:chExt cx="0" cy="0"/>
+        </a:xfrm>
+      </p:grpSpPr>
       <p:sp>
         <p:nvSpPr>
           <p:cNvPr id="2" name="Rectangle 1"/>
@@ -3422,6 +3737,7 @@
           <a:lstStyle/>
           <a:p>
             <a:pPr algn="ctr"/>
+            <a:endParaRPr/>
           </a:p>
         </p:txBody>
       </p:sp>
@@ -3465,6 +3781,7 @@
           <a:lstStyle/>
           <a:p>
             <a:pPr algn="ctr"/>
+            <a:endParaRPr/>
           </a:p>
         </p:txBody>
       </p:sp>
@@ -3508,6 +3825,7 @@
           <a:lstStyle/>
           <a:p>
             <a:pPr algn="ctr"/>
+            <a:endParaRPr/>
           </a:p>
         </p:txBody>
       </p:sp>
@@ -3586,6 +3904,7 @@
           <a:lstStyle/>
           <a:p>
             <a:pPr algn="ctr"/>
+            <a:endParaRPr/>
           </a:p>
         </p:txBody>
       </p:sp>
@@ -3632,15 +3951,12 @@
                 <a:spcPts val="400"/>
               </a:spcAft>
             </a:pPr>
-            <a:r>
-              <a:rPr sz="1800" b="0">
-                <a:solidFill>
-                  <a:srgbClr val="222222"/>
-                </a:solidFill>
-                <a:latin typeface="Calibri"/>
-              </a:rPr>
-              <a:t/>
-            </a:r>
+            <a:endParaRPr sz="1800" b="1">
+              <a:solidFill>
+                <a:srgbClr val="222222"/>
+              </a:solidFill>
+              <a:latin typeface="Calibri"/>
+            </a:endParaRPr>
           </a:p>
           <a:p>
             <a:pPr algn="l">
@@ -3700,6 +4016,7 @@
           <a:lstStyle/>
           <a:p>
             <a:pPr algn="ctr"/>
+            <a:endParaRPr/>
           </a:p>
         </p:txBody>
       </p:sp>
@@ -3746,15 +4063,12 @@
                 <a:spcPts val="400"/>
               </a:spcAft>
             </a:pPr>
-            <a:r>
-              <a:rPr sz="1500" b="0">
-                <a:solidFill>
-                  <a:srgbClr val="222222"/>
-                </a:solidFill>
-                <a:latin typeface="Calibri"/>
-              </a:rPr>
-              <a:t/>
-            </a:r>
+            <a:endParaRPr sz="1500" b="1">
+              <a:solidFill>
+                <a:srgbClr val="222222"/>
+              </a:solidFill>
+              <a:latin typeface="Calibri"/>
+            </a:endParaRPr>
           </a:p>
           <a:p>
             <a:pPr algn="l">
@@ -3778,15 +4092,12 @@
                 <a:spcPts val="400"/>
               </a:spcAft>
             </a:pPr>
-            <a:r>
-              <a:rPr sz="1500" b="0">
-                <a:solidFill>
-                  <a:srgbClr val="222222"/>
-                </a:solidFill>
-                <a:latin typeface="Calibri"/>
-              </a:rPr>
-              <a:t/>
-            </a:r>
+            <a:endParaRPr sz="1500" b="0">
+              <a:solidFill>
+                <a:srgbClr val="222222"/>
+              </a:solidFill>
+              <a:latin typeface="Calibri"/>
+            </a:endParaRPr>
           </a:p>
           <a:p>
             <a:pPr algn="l">
@@ -3846,6 +4157,7 @@
           <a:lstStyle/>
           <a:p>
             <a:pPr algn="ctr"/>
+            <a:endParaRPr/>
           </a:p>
         </p:txBody>
       </p:sp>
@@ -3892,15 +4204,12 @@
                 <a:spcPts val="400"/>
               </a:spcAft>
             </a:pPr>
-            <a:r>
-              <a:rPr sz="1500" b="0">
-                <a:solidFill>
-                  <a:srgbClr val="222222"/>
-                </a:solidFill>
-                <a:latin typeface="Calibri"/>
-              </a:rPr>
-              <a:t/>
-            </a:r>
+            <a:endParaRPr sz="1500" b="1">
+              <a:solidFill>
+                <a:srgbClr val="222222"/>
+              </a:solidFill>
+              <a:latin typeface="Calibri"/>
+            </a:endParaRPr>
           </a:p>
           <a:p>
             <a:pPr algn="l">
@@ -3924,15 +4233,12 @@
                 <a:spcPts val="400"/>
               </a:spcAft>
             </a:pPr>
-            <a:r>
-              <a:rPr sz="1500" b="0">
-                <a:solidFill>
-                  <a:srgbClr val="222222"/>
-                </a:solidFill>
-                <a:latin typeface="Calibri"/>
-              </a:rPr>
-              <a:t/>
-            </a:r>
+            <a:endParaRPr sz="1500" b="0">
+              <a:solidFill>
+                <a:srgbClr val="222222"/>
+              </a:solidFill>
+              <a:latin typeface="Calibri"/>
+            </a:endParaRPr>
           </a:p>
           <a:p>
             <a:pPr algn="l">
@@ -4031,7 +4337,7 @@
 </file>
 
 <file path=ppt/slides/slide3.xml><?xml version="1.0" encoding="utf-8"?>
-<p:sld xmlns:a="http://schemas.openxmlformats.org/drawingml/2006/main" xmlns:p="http://schemas.openxmlformats.org/presentationml/2006/main" xmlns:r="http://schemas.openxmlformats.org/officeDocument/2006/relationships">
+<p:sld xmlns:a="http://schemas.openxmlformats.org/drawingml/2006/main" xmlns:r="http://schemas.openxmlformats.org/officeDocument/2006/relationships" xmlns:p="http://schemas.openxmlformats.org/presentationml/2006/main">
   <p:cSld>
     <p:spTree>
       <p:nvGrpSpPr>
@@ -4039,7 +4345,14 @@
         <p:cNvGrpSpPr/>
         <p:nvPr/>
       </p:nvGrpSpPr>
-      <p:grpSpPr/>
+      <p:grpSpPr>
+        <a:xfrm>
+          <a:off x="0" y="0"/>
+          <a:ext cx="0" cy="0"/>
+          <a:chOff x="0" y="0"/>
+          <a:chExt cx="0" cy="0"/>
+        </a:xfrm>
+      </p:grpSpPr>
       <p:sp>
         <p:nvSpPr>
           <p:cNvPr id="2" name="Rectangle 1"/>
@@ -4080,6 +4393,7 @@
           <a:lstStyle/>
           <a:p>
             <a:pPr algn="ctr"/>
+            <a:endParaRPr/>
           </a:p>
         </p:txBody>
       </p:sp>
@@ -4123,6 +4437,7 @@
           <a:lstStyle/>
           <a:p>
             <a:pPr algn="ctr"/>
+            <a:endParaRPr/>
           </a:p>
         </p:txBody>
       </p:sp>
@@ -4166,6 +4481,7 @@
           <a:lstStyle/>
           <a:p>
             <a:pPr algn="ctr"/>
+            <a:endParaRPr/>
           </a:p>
         </p:txBody>
       </p:sp>
@@ -4244,6 +4560,7 @@
           <a:lstStyle/>
           <a:p>
             <a:pPr algn="ctr"/>
+            <a:endParaRPr/>
           </a:p>
         </p:txBody>
       </p:sp>
@@ -4271,13 +4588,22 @@
           <a:p>
             <a:pPr algn="l"/>
             <a:r>
-              <a:rPr sz="1700" b="0">
+              <a:rPr sz="1700" b="0" dirty="0" err="1">
                 <a:solidFill>
                   <a:srgbClr val="222222"/>
                 </a:solidFill>
                 <a:latin typeface="Calibri"/>
               </a:rPr>
-              <a:t>ResQ connects the patient, ambulance driver, admin dispatcher, and hospital ER into one real-time platform — from the moment a patient needs help to the moment they reach the ER.</a:t>
+              <a:t>ResQ</a:t>
+            </a:r>
+            <a:r>
+              <a:rPr sz="1700" b="0" dirty="0">
+                <a:solidFill>
+                  <a:srgbClr val="222222"/>
+                </a:solidFill>
+                <a:latin typeface="Calibri"/>
+              </a:rPr>
+              <a:t> connects the patient, ambulance driver, admin dispatcher, and hospital ER into one real-time platform — from the moment a patient needs help to the moment they reach the ER.</a:t>
             </a:r>
           </a:p>
         </p:txBody>
@@ -4322,6 +4648,7 @@
           <a:lstStyle/>
           <a:p>
             <a:pPr algn="ctr"/>
+            <a:endParaRPr/>
           </a:p>
         </p:txBody>
       </p:sp>
@@ -4368,15 +4695,12 @@
                 <a:spcPts val="400"/>
               </a:spcAft>
             </a:pPr>
-            <a:r>
-              <a:rPr sz="1400" b="0">
-                <a:solidFill>
-                  <a:srgbClr val="222222"/>
-                </a:solidFill>
-                <a:latin typeface="Calibri"/>
-              </a:rPr>
-              <a:t/>
-            </a:r>
+            <a:endParaRPr sz="1400" b="1">
+              <a:solidFill>
+                <a:srgbClr val="222222"/>
+              </a:solidFill>
+              <a:latin typeface="Calibri"/>
+            </a:endParaRPr>
           </a:p>
           <a:p>
             <a:pPr algn="l">
@@ -4436,6 +4760,7 @@
           <a:lstStyle/>
           <a:p>
             <a:pPr algn="ctr"/>
+            <a:endParaRPr/>
           </a:p>
         </p:txBody>
       </p:sp>
@@ -4482,15 +4807,12 @@
                 <a:spcPts val="400"/>
               </a:spcAft>
             </a:pPr>
-            <a:r>
-              <a:rPr sz="1400" b="0">
-                <a:solidFill>
-                  <a:srgbClr val="222222"/>
-                </a:solidFill>
-                <a:latin typeface="Calibri"/>
-              </a:rPr>
-              <a:t/>
-            </a:r>
+            <a:endParaRPr sz="1400" b="1">
+              <a:solidFill>
+                <a:srgbClr val="222222"/>
+              </a:solidFill>
+              <a:latin typeface="Calibri"/>
+            </a:endParaRPr>
           </a:p>
           <a:p>
             <a:pPr algn="l">
@@ -4550,6 +4872,7 @@
           <a:lstStyle/>
           <a:p>
             <a:pPr algn="ctr"/>
+            <a:endParaRPr/>
           </a:p>
         </p:txBody>
       </p:sp>
@@ -4596,15 +4919,12 @@
                 <a:spcPts val="400"/>
               </a:spcAft>
             </a:pPr>
-            <a:r>
-              <a:rPr sz="1400" b="0">
-                <a:solidFill>
-                  <a:srgbClr val="222222"/>
-                </a:solidFill>
-                <a:latin typeface="Calibri"/>
-              </a:rPr>
-              <a:t/>
-            </a:r>
+            <a:endParaRPr sz="1400" b="1">
+              <a:solidFill>
+                <a:srgbClr val="222222"/>
+              </a:solidFill>
+              <a:latin typeface="Calibri"/>
+            </a:endParaRPr>
           </a:p>
           <a:p>
             <a:pPr algn="l">
@@ -4664,6 +4984,7 @@
           <a:lstStyle/>
           <a:p>
             <a:pPr algn="ctr"/>
+            <a:endParaRPr/>
           </a:p>
         </p:txBody>
       </p:sp>
@@ -4710,15 +5031,12 @@
                 <a:spcPts val="400"/>
               </a:spcAft>
             </a:pPr>
-            <a:r>
-              <a:rPr sz="1400" b="0">
-                <a:solidFill>
-                  <a:srgbClr val="222222"/>
-                </a:solidFill>
-                <a:latin typeface="Calibri"/>
-              </a:rPr>
-              <a:t/>
-            </a:r>
+            <a:endParaRPr sz="1400" b="1">
+              <a:solidFill>
+                <a:srgbClr val="222222"/>
+              </a:solidFill>
+              <a:latin typeface="Calibri"/>
+            </a:endParaRPr>
           </a:p>
           <a:p>
             <a:pPr algn="l">
@@ -4782,7 +5100,7 @@
 </file>
 
 <file path=ppt/slides/slide4.xml><?xml version="1.0" encoding="utf-8"?>
-<p:sld xmlns:a="http://schemas.openxmlformats.org/drawingml/2006/main" xmlns:p="http://schemas.openxmlformats.org/presentationml/2006/main" xmlns:r="http://schemas.openxmlformats.org/officeDocument/2006/relationships">
+<p:sld xmlns:a="http://schemas.openxmlformats.org/drawingml/2006/main" xmlns:r="http://schemas.openxmlformats.org/officeDocument/2006/relationships" xmlns:p="http://schemas.openxmlformats.org/presentationml/2006/main">
   <p:cSld>
     <p:spTree>
       <p:nvGrpSpPr>
@@ -4790,7 +5108,14 @@
         <p:cNvGrpSpPr/>
         <p:nvPr/>
       </p:nvGrpSpPr>
-      <p:grpSpPr/>
+      <p:grpSpPr>
+        <a:xfrm>
+          <a:off x="0" y="0"/>
+          <a:ext cx="0" cy="0"/>
+          <a:chOff x="0" y="0"/>
+          <a:chExt cx="0" cy="0"/>
+        </a:xfrm>
+      </p:grpSpPr>
       <p:sp>
         <p:nvSpPr>
           <p:cNvPr id="2" name="Rectangle 1"/>
@@ -4831,6 +5156,7 @@
           <a:lstStyle/>
           <a:p>
             <a:pPr algn="ctr"/>
+            <a:endParaRPr/>
           </a:p>
         </p:txBody>
       </p:sp>
@@ -4874,6 +5200,7 @@
           <a:lstStyle/>
           <a:p>
             <a:pPr algn="ctr"/>
+            <a:endParaRPr/>
           </a:p>
         </p:txBody>
       </p:sp>
@@ -4917,6 +5244,7 @@
           <a:lstStyle/>
           <a:p>
             <a:pPr algn="ctr"/>
+            <a:endParaRPr/>
           </a:p>
         </p:txBody>
       </p:sp>
@@ -4995,6 +5323,7 @@
           <a:lstStyle/>
           <a:p>
             <a:pPr algn="ctr"/>
+            <a:endParaRPr/>
           </a:p>
         </p:txBody>
       </p:sp>
@@ -5038,6 +5367,7 @@
           <a:lstStyle/>
           <a:p>
             <a:pPr algn="ctr"/>
+            <a:endParaRPr/>
           </a:p>
         </p:txBody>
       </p:sp>
@@ -5155,6 +5485,7 @@
           <a:lstStyle/>
           <a:p>
             <a:pPr algn="ctr"/>
+            <a:endParaRPr/>
           </a:p>
         </p:txBody>
       </p:sp>
@@ -5272,6 +5603,7 @@
           <a:lstStyle/>
           <a:p>
             <a:pPr algn="ctr"/>
+            <a:endParaRPr/>
           </a:p>
         </p:txBody>
       </p:sp>
@@ -5389,6 +5721,7 @@
           <a:lstStyle/>
           <a:p>
             <a:pPr algn="ctr"/>
+            <a:endParaRPr/>
           </a:p>
         </p:txBody>
       </p:sp>
@@ -5506,6 +5839,7 @@
           <a:lstStyle/>
           <a:p>
             <a:pPr algn="ctr"/>
+            <a:endParaRPr/>
           </a:p>
         </p:txBody>
       </p:sp>
@@ -5627,7 +5961,7 @@
 </file>
 
 <file path=ppt/slides/slide5.xml><?xml version="1.0" encoding="utf-8"?>
-<p:sld xmlns:a="http://schemas.openxmlformats.org/drawingml/2006/main" xmlns:p="http://schemas.openxmlformats.org/presentationml/2006/main" xmlns:r="http://schemas.openxmlformats.org/officeDocument/2006/relationships">
+<p:sld xmlns:a="http://schemas.openxmlformats.org/drawingml/2006/main" xmlns:r="http://schemas.openxmlformats.org/officeDocument/2006/relationships" xmlns:p="http://schemas.openxmlformats.org/presentationml/2006/main">
   <p:cSld>
     <p:spTree>
       <p:nvGrpSpPr>
@@ -5635,7 +5969,14 @@
         <p:cNvGrpSpPr/>
         <p:nvPr/>
       </p:nvGrpSpPr>
-      <p:grpSpPr/>
+      <p:grpSpPr>
+        <a:xfrm>
+          <a:off x="0" y="0"/>
+          <a:ext cx="0" cy="0"/>
+          <a:chOff x="0" y="0"/>
+          <a:chExt cx="0" cy="0"/>
+        </a:xfrm>
+      </p:grpSpPr>
       <p:sp>
         <p:nvSpPr>
           <p:cNvPr id="2" name="Rectangle 1"/>
@@ -5676,6 +6017,7 @@
           <a:lstStyle/>
           <a:p>
             <a:pPr algn="ctr"/>
+            <a:endParaRPr/>
           </a:p>
         </p:txBody>
       </p:sp>
@@ -5719,6 +6061,7 @@
           <a:lstStyle/>
           <a:p>
             <a:pPr algn="ctr"/>
+            <a:endParaRPr/>
           </a:p>
         </p:txBody>
       </p:sp>
@@ -5762,6 +6105,7 @@
           <a:lstStyle/>
           <a:p>
             <a:pPr algn="ctr"/>
+            <a:endParaRPr/>
           </a:p>
         </p:txBody>
       </p:sp>
@@ -5793,9 +6137,8 @@
                 <a:solidFill>
                   <a:srgbClr val="1A1A2E"/>
                 </a:solidFill>
-                <a:latin typeface="Calibri"/>
-              </a:rPr>
-              <a:t>Feature 2 — Green Corridor</a:t>
+              </a:rPr>
+              <a:t>Feature 2 — Driver Portal</a:t>
             </a:r>
           </a:p>
         </p:txBody>
@@ -5840,6 +6183,7 @@
           <a:lstStyle/>
           <a:p>
             <a:pPr algn="ctr"/>
+            <a:endParaRPr/>
           </a:p>
         </p:txBody>
       </p:sp>
@@ -5851,8 +6195,8 @@
         </p:nvSpPr>
         <p:spPr>
           <a:xfrm>
-            <a:off x="457200" y="1005840"/>
-            <a:ext cx="10972800" cy="411480"/>
+            <a:off x="457200" y="920000"/>
+            <a:ext cx="10972800" cy="280000"/>
           </a:xfrm>
           <a:prstGeom prst="rect">
             <a:avLst/>
@@ -5867,11 +6211,10 @@
           <a:p>
             <a:pPr algn="l"/>
             <a:r>
-              <a:rPr sz="1700" b="1">
+              <a:rPr sz="1500" b="0">
                 <a:solidFill>
                   <a:srgbClr val="CC0000"/>
                 </a:solidFill>
-                <a:latin typeface="Calibri"/>
               </a:rPr>
               <a:t>Solves Problem 1 — Ambulance stuck in traffic</a:t>
             </a:r>
@@ -5880,90 +6223,20 @@
       </p:sp>
       <p:sp>
         <p:nvSpPr>
-          <p:cNvPr id="8" name="TextBox 7"/>
-          <p:cNvSpPr txBox="1"/>
-          <p:nvPr/>
-        </p:nvSpPr>
-        <p:spPr>
-          <a:xfrm>
-            <a:off x="457200" y="1508760"/>
-            <a:ext cx="11247120" cy="1005840"/>
-          </a:xfrm>
-          <a:prstGeom prst="rect">
-            <a:avLst/>
-          </a:prstGeom>
-          <a:noFill/>
-        </p:spPr>
-        <p:txBody>
-          <a:bodyPr wrap="square">
-            <a:spAutoFit/>
-          </a:bodyPr>
-          <a:lstStyle/>
-          <a:p>
-            <a:pPr algn="l"/>
-            <a:r>
-              <a:rPr sz="1600" b="0">
-                <a:solidFill>
-                  <a:srgbClr val="222222"/>
-                </a:solidFill>
-                <a:latin typeface="Calibri"/>
-              </a:rPr>
-              <a:t>When the driver activates Green Corridor, the system places traffic signals along the entire route to the hospital. As the ambulance moves forward, signals automatically turn green ahead of it and reset to red behind it. The ambulance gets a clear road all the way.</a:t>
-            </a:r>
-          </a:p>
-        </p:txBody>
-      </p:sp>
-      <p:sp>
-        <p:nvSpPr>
-          <p:cNvPr id="9" name="TextBox 8"/>
-          <p:cNvSpPr txBox="1"/>
-          <p:nvPr/>
-        </p:nvSpPr>
-        <p:spPr>
-          <a:xfrm>
-            <a:off x="457200" y="2606040"/>
-            <a:ext cx="10972800" cy="411480"/>
-          </a:xfrm>
-          <a:prstGeom prst="rect">
-            <a:avLst/>
-          </a:prstGeom>
-          <a:noFill/>
-        </p:spPr>
-        <p:txBody>
-          <a:bodyPr wrap="square">
-            <a:spAutoFit/>
-          </a:bodyPr>
-          <a:lstStyle/>
-          <a:p>
-            <a:pPr algn="l"/>
-            <a:r>
-              <a:rPr sz="1600" b="1">
-                <a:solidFill>
-                  <a:srgbClr val="1A1A2E"/>
-                </a:solidFill>
-                <a:latin typeface="Calibri"/>
-              </a:rPr>
-              <a:t>How it works:</a:t>
-            </a:r>
-          </a:p>
-        </p:txBody>
-      </p:sp>
-      <p:sp>
-        <p:nvSpPr>
-          <p:cNvPr id="10" name="Rectangle 9"/>
+          <p:cNvPr id="8" name="Rectangle 7"/>
           <p:cNvSpPr/>
           <p:nvPr/>
         </p:nvSpPr>
         <p:spPr>
           <a:xfrm>
-            <a:off x="457200" y="3127248"/>
-            <a:ext cx="201168" cy="201168"/>
+            <a:off x="457200" y="1270000"/>
+            <a:ext cx="1097280" cy="550000"/>
           </a:xfrm>
           <a:prstGeom prst="rect">
             <a:avLst/>
           </a:prstGeom>
           <a:solidFill>
-            <a:srgbClr val="CC0000"/>
+            <a:srgbClr val="1A1A2E"/>
           </a:solidFill>
           <a:ln>
             <a:noFill/>
@@ -5988,19 +6261,20 @@
           <a:lstStyle/>
           <a:p>
             <a:pPr algn="ctr"/>
-          </a:p>
-        </p:txBody>
-      </p:sp>
-      <p:sp>
-        <p:nvSpPr>
-          <p:cNvPr id="11" name="TextBox 10"/>
+            <a:endParaRPr/>
+          </a:p>
+        </p:txBody>
+      </p:sp>
+      <p:sp>
+        <p:nvSpPr>
+          <p:cNvPr id="9" name="TextBox 8"/>
           <p:cNvSpPr txBox="1"/>
           <p:nvPr/>
         </p:nvSpPr>
         <p:spPr>
           <a:xfrm>
-            <a:off x="822960" y="3017520"/>
-            <a:ext cx="10881360" cy="502920"/>
+            <a:off x="457200" y="1270000"/>
+            <a:ext cx="1097280" cy="550000"/>
           </a:xfrm>
           <a:prstGeom prst="rect">
             <a:avLst/>
@@ -6013,35 +6287,69 @@
           </a:bodyPr>
           <a:lstStyle/>
           <a:p>
+            <a:pPr algn="ctr"/>
+            <a:r>
+              <a:rPr sz="1200" b="1">
+                <a:solidFill>
+                  <a:srgbClr val="FFFFFF"/>
+                </a:solidFill>
+              </a:rPr>
+              <a:t>Receive
+Requests</a:t>
+            </a:r>
+          </a:p>
+        </p:txBody>
+      </p:sp>
+      <p:sp>
+        <p:nvSpPr>
+          <p:cNvPr id="10" name="TextBox 9"/>
+          <p:cNvSpPr txBox="1"/>
+          <p:nvPr/>
+        </p:nvSpPr>
+        <p:spPr>
+          <a:xfrm>
+            <a:off x="1737360" y="1290000"/>
+            <a:ext cx="9875520" cy="550000"/>
+          </a:xfrm>
+          <a:prstGeom prst="rect">
+            <a:avLst/>
+          </a:prstGeom>
+          <a:noFill/>
+        </p:spPr>
+        <p:txBody>
+          <a:bodyPr wrap="square">
+            <a:spAutoFit/>
+          </a:bodyPr>
+          <a:lstStyle/>
+          <a:p>
             <a:pPr algn="l"/>
             <a:r>
               <a:rPr sz="1400" b="0">
                 <a:solidFill>
                   <a:srgbClr val="222222"/>
                 </a:solidFill>
-                <a:latin typeface="Calibri"/>
-              </a:rPr>
-              <a:t>The route from the ambulance to the hospital is calculated using real road data.</a:t>
-            </a:r>
-          </a:p>
-        </p:txBody>
-      </p:sp>
-      <p:sp>
-        <p:nvSpPr>
-          <p:cNvPr id="12" name="Rectangle 11"/>
+              </a:rPr>
+              <a:t>Driver receives emergency booking requests live on the portal as soon as a patient confirms a booking.</a:t>
+            </a:r>
+          </a:p>
+        </p:txBody>
+      </p:sp>
+      <p:sp>
+        <p:nvSpPr>
+          <p:cNvPr id="11" name="Rectangle 10"/>
           <p:cNvSpPr/>
           <p:nvPr/>
         </p:nvSpPr>
         <p:spPr>
           <a:xfrm>
-            <a:off x="457200" y="3675887"/>
-            <a:ext cx="201168" cy="201168"/>
+            <a:off x="457200" y="1862000"/>
+            <a:ext cx="1097280" cy="550000"/>
           </a:xfrm>
           <a:prstGeom prst="rect">
             <a:avLst/>
           </a:prstGeom>
           <a:solidFill>
-            <a:srgbClr val="CC0000"/>
+            <a:srgbClr val="1A1A2E"/>
           </a:solidFill>
           <a:ln>
             <a:noFill/>
@@ -6066,19 +6374,20 @@
           <a:lstStyle/>
           <a:p>
             <a:pPr algn="ctr"/>
-          </a:p>
-        </p:txBody>
-      </p:sp>
-      <p:sp>
-        <p:nvSpPr>
-          <p:cNvPr id="13" name="TextBox 12"/>
+            <a:endParaRPr/>
+          </a:p>
+        </p:txBody>
+      </p:sp>
+      <p:sp>
+        <p:nvSpPr>
+          <p:cNvPr id="12" name="TextBox 11"/>
           <p:cNvSpPr txBox="1"/>
           <p:nvPr/>
         </p:nvSpPr>
         <p:spPr>
           <a:xfrm>
-            <a:off x="822960" y="3566160"/>
-            <a:ext cx="10881360" cy="502920"/>
+            <a:off x="457200" y="1862000"/>
+            <a:ext cx="1097280" cy="550000"/>
           </a:xfrm>
           <a:prstGeom prst="rect">
             <a:avLst/>
@@ -6091,15 +6400,49 @@
           </a:bodyPr>
           <a:lstStyle/>
           <a:p>
+            <a:pPr algn="ctr"/>
+            <a:r>
+              <a:rPr sz="1200" b="1">
+                <a:solidFill>
+                  <a:srgbClr val="FFFFFF"/>
+                </a:solidFill>
+              </a:rPr>
+              <a:t>Accept /
+Reject</a:t>
+            </a:r>
+          </a:p>
+        </p:txBody>
+      </p:sp>
+      <p:sp>
+        <p:nvSpPr>
+          <p:cNvPr id="13" name="TextBox 12"/>
+          <p:cNvSpPr txBox="1"/>
+          <p:nvPr/>
+        </p:nvSpPr>
+        <p:spPr>
+          <a:xfrm>
+            <a:off x="1737360" y="1882000"/>
+            <a:ext cx="9875520" cy="550000"/>
+          </a:xfrm>
+          <a:prstGeom prst="rect">
+            <a:avLst/>
+          </a:prstGeom>
+          <a:noFill/>
+        </p:spPr>
+        <p:txBody>
+          <a:bodyPr wrap="square">
+            <a:spAutoFit/>
+          </a:bodyPr>
+          <a:lstStyle/>
+          <a:p>
             <a:pPr algn="l"/>
             <a:r>
               <a:rPr sz="1400" b="0">
                 <a:solidFill>
                   <a:srgbClr val="222222"/>
                 </a:solidFill>
-                <a:latin typeface="Calibri"/>
-              </a:rPr>
-              <a:t>7 virtual traffic signals are placed along this route.</a:t>
+              </a:rPr>
+              <a:t>Driver can accept or reject an incoming booking request directly from the Driver Portal.</a:t>
             </a:r>
           </a:p>
         </p:txBody>
@@ -6112,14 +6455,14 @@
         </p:nvSpPr>
         <p:spPr>
           <a:xfrm>
-            <a:off x="457200" y="4224528"/>
-            <a:ext cx="201168" cy="201168"/>
+            <a:off x="457200" y="2454000"/>
+            <a:ext cx="1097280" cy="550000"/>
           </a:xfrm>
           <a:prstGeom prst="rect">
             <a:avLst/>
           </a:prstGeom>
           <a:solidFill>
-            <a:srgbClr val="CC0000"/>
+            <a:srgbClr val="1A1A2E"/>
           </a:solidFill>
           <a:ln>
             <a:noFill/>
@@ -6144,6 +6487,7 @@
           <a:lstStyle/>
           <a:p>
             <a:pPr algn="ctr"/>
+            <a:endParaRPr/>
           </a:p>
         </p:txBody>
       </p:sp>
@@ -6155,8 +6499,8 @@
         </p:nvSpPr>
         <p:spPr>
           <a:xfrm>
-            <a:off x="822960" y="4114800"/>
-            <a:ext cx="10881360" cy="502920"/>
+            <a:off x="457200" y="2454000"/>
+            <a:ext cx="1097280" cy="550000"/>
           </a:xfrm>
           <a:prstGeom prst="rect">
             <a:avLst/>
@@ -6169,35 +6513,69 @@
           </a:bodyPr>
           <a:lstStyle/>
           <a:p>
+            <a:pPr algn="ctr"/>
+            <a:r>
+              <a:rPr sz="1200" b="1">
+                <a:solidFill>
+                  <a:srgbClr val="FFFFFF"/>
+                </a:solidFill>
+              </a:rPr>
+              <a:t>GPS
+Navigation</a:t>
+            </a:r>
+          </a:p>
+        </p:txBody>
+      </p:sp>
+      <p:sp>
+        <p:nvSpPr>
+          <p:cNvPr id="16" name="TextBox 15"/>
+          <p:cNvSpPr txBox="1"/>
+          <p:nvPr/>
+        </p:nvSpPr>
+        <p:spPr>
+          <a:xfrm>
+            <a:off x="1737360" y="2474000"/>
+            <a:ext cx="9875520" cy="550000"/>
+          </a:xfrm>
+          <a:prstGeom prst="rect">
+            <a:avLst/>
+          </a:prstGeom>
+          <a:noFill/>
+        </p:spPr>
+        <p:txBody>
+          <a:bodyPr wrap="square">
+            <a:spAutoFit/>
+          </a:bodyPr>
+          <a:lstStyle/>
+          <a:p>
             <a:pPr algn="l"/>
             <a:r>
               <a:rPr sz="1400" b="0">
                 <a:solidFill>
                   <a:srgbClr val="222222"/>
                 </a:solidFill>
-                <a:latin typeface="Calibri"/>
-              </a:rPr>
-              <a:t>When the ambulance is 800 metres away from a signal — it turns yellow.</a:t>
-            </a:r>
-          </a:p>
-        </p:txBody>
-      </p:sp>
-      <p:sp>
-        <p:nvSpPr>
-          <p:cNvPr id="16" name="Rectangle 15"/>
+              </a:rPr>
+              <a:t>Driver gets turn-by-turn GPS navigation to the patient's location after accepting the booking.</a:t>
+            </a:r>
+          </a:p>
+        </p:txBody>
+      </p:sp>
+      <p:sp>
+        <p:nvSpPr>
+          <p:cNvPr id="17" name="Rectangle 16"/>
           <p:cNvSpPr/>
           <p:nvPr/>
         </p:nvSpPr>
         <p:spPr>
           <a:xfrm>
-            <a:off x="457200" y="4773168"/>
-            <a:ext cx="201168" cy="201168"/>
+            <a:off x="457200" y="3046000"/>
+            <a:ext cx="1097280" cy="550000"/>
           </a:xfrm>
           <a:prstGeom prst="rect">
             <a:avLst/>
           </a:prstGeom>
           <a:solidFill>
-            <a:srgbClr val="CC0000"/>
+            <a:srgbClr val="1A1A2E"/>
           </a:solidFill>
           <a:ln>
             <a:noFill/>
@@ -6222,19 +6600,20 @@
           <a:lstStyle/>
           <a:p>
             <a:pPr algn="ctr"/>
-          </a:p>
-        </p:txBody>
-      </p:sp>
-      <p:sp>
-        <p:nvSpPr>
-          <p:cNvPr id="17" name="TextBox 16"/>
+            <a:endParaRPr/>
+          </a:p>
+        </p:txBody>
+      </p:sp>
+      <p:sp>
+        <p:nvSpPr>
+          <p:cNvPr id="18" name="TextBox 17"/>
           <p:cNvSpPr txBox="1"/>
           <p:nvPr/>
         </p:nvSpPr>
         <p:spPr>
           <a:xfrm>
-            <a:off x="822960" y="4663440"/>
-            <a:ext cx="10881360" cy="502920"/>
+            <a:off x="457200" y="3046000"/>
+            <a:ext cx="1097280" cy="550000"/>
           </a:xfrm>
           <a:prstGeom prst="rect">
             <a:avLst/>
@@ -6247,35 +6626,69 @@
           </a:bodyPr>
           <a:lstStyle/>
           <a:p>
+            <a:pPr algn="ctr"/>
+            <a:r>
+              <a:rPr sz="1200" b="1">
+                <a:solidFill>
+                  <a:srgbClr val="FFFFFF"/>
+                </a:solidFill>
+              </a:rPr>
+              <a:t>Green
+Corridor</a:t>
+            </a:r>
+          </a:p>
+        </p:txBody>
+      </p:sp>
+      <p:sp>
+        <p:nvSpPr>
+          <p:cNvPr id="19" name="TextBox 18"/>
+          <p:cNvSpPr txBox="1"/>
+          <p:nvPr/>
+        </p:nvSpPr>
+        <p:spPr>
+          <a:xfrm>
+            <a:off x="1737360" y="3066000"/>
+            <a:ext cx="9875520" cy="550000"/>
+          </a:xfrm>
+          <a:prstGeom prst="rect">
+            <a:avLst/>
+          </a:prstGeom>
+          <a:noFill/>
+        </p:spPr>
+        <p:txBody>
+          <a:bodyPr wrap="square">
+            <a:spAutoFit/>
+          </a:bodyPr>
+          <a:lstStyle/>
+          <a:p>
             <a:pPr algn="l"/>
             <a:r>
               <a:rPr sz="1400" b="0">
                 <a:solidFill>
                   <a:srgbClr val="222222"/>
                 </a:solidFill>
-                <a:latin typeface="Calibri"/>
-              </a:rPr>
-              <a:t>When the ambulance is 400 metres away — it turns green.</a:t>
-            </a:r>
-          </a:p>
-        </p:txBody>
-      </p:sp>
-      <p:sp>
-        <p:nvSpPr>
-          <p:cNvPr id="18" name="Rectangle 17"/>
+              </a:rPr>
+              <a:t>Driver activates Green Corridor — 7 virtual traffic signals along the route turn green 400m ahead of the ambulance automatically.</a:t>
+            </a:r>
+          </a:p>
+        </p:txBody>
+      </p:sp>
+      <p:sp>
+        <p:nvSpPr>
+          <p:cNvPr id="20" name="Rectangle 19"/>
           <p:cNvSpPr/>
           <p:nvPr/>
         </p:nvSpPr>
         <p:spPr>
           <a:xfrm>
-            <a:off x="457200" y="5321807"/>
-            <a:ext cx="201168" cy="201168"/>
+            <a:off x="457200" y="3638000"/>
+            <a:ext cx="1097280" cy="550000"/>
           </a:xfrm>
           <a:prstGeom prst="rect">
             <a:avLst/>
           </a:prstGeom>
           <a:solidFill>
-            <a:srgbClr val="CC0000"/>
+            <a:srgbClr val="1A1A2E"/>
           </a:solidFill>
           <a:ln>
             <a:noFill/>
@@ -6300,19 +6713,20 @@
           <a:lstStyle/>
           <a:p>
             <a:pPr algn="ctr"/>
-          </a:p>
-        </p:txBody>
-      </p:sp>
-      <p:sp>
-        <p:nvSpPr>
-          <p:cNvPr id="19" name="TextBox 18"/>
+            <a:endParaRPr/>
+          </a:p>
+        </p:txBody>
+      </p:sp>
+      <p:sp>
+        <p:nvSpPr>
+          <p:cNvPr id="21" name="TextBox 20"/>
           <p:cNvSpPr txBox="1"/>
           <p:nvPr/>
         </p:nvSpPr>
         <p:spPr>
           <a:xfrm>
-            <a:off x="822960" y="5212079"/>
-            <a:ext cx="10881360" cy="502920"/>
+            <a:off x="457200" y="3638000"/>
+            <a:ext cx="1097280" cy="550000"/>
           </a:xfrm>
           <a:prstGeom prst="rect">
             <a:avLst/>
@@ -6325,35 +6739,69 @@
           </a:bodyPr>
           <a:lstStyle/>
           <a:p>
+            <a:pPr algn="ctr"/>
+            <a:r>
+              <a:rPr sz="1200" b="1">
+                <a:solidFill>
+                  <a:srgbClr val="FFFFFF"/>
+                </a:solidFill>
+              </a:rPr>
+              <a:t>Send
+Vitals</a:t>
+            </a:r>
+          </a:p>
+        </p:txBody>
+      </p:sp>
+      <p:sp>
+        <p:nvSpPr>
+          <p:cNvPr id="22" name="TextBox 21"/>
+          <p:cNvSpPr txBox="1"/>
+          <p:nvPr/>
+        </p:nvSpPr>
+        <p:spPr>
+          <a:xfrm>
+            <a:off x="1737360" y="3658000"/>
+            <a:ext cx="9875520" cy="550000"/>
+          </a:xfrm>
+          <a:prstGeom prst="rect">
+            <a:avLst/>
+          </a:prstGeom>
+          <a:noFill/>
+        </p:spPr>
+        <p:txBody>
+          <a:bodyPr wrap="square">
+            <a:spAutoFit/>
+          </a:bodyPr>
+          <a:lstStyle/>
+          <a:p>
             <a:pPr algn="l"/>
             <a:r>
               <a:rPr sz="1400" b="0">
                 <a:solidFill>
                   <a:srgbClr val="222222"/>
                 </a:solidFill>
-                <a:latin typeface="Calibri"/>
-              </a:rPr>
-              <a:t>Once the ambulance passes — the signal resets to red.</a:t>
-            </a:r>
-          </a:p>
-        </p:txBody>
-      </p:sp>
-      <p:sp>
-        <p:nvSpPr>
-          <p:cNvPr id="20" name="Rectangle 19"/>
+              </a:rPr>
+              <a:t>Driver enters patient vitals (Heart Rate, SpO2, Blood Pressure, Temperature, Condition) and streams live ECG to the Hospital ER while driving.</a:t>
+            </a:r>
+          </a:p>
+        </p:txBody>
+      </p:sp>
+      <p:sp>
+        <p:nvSpPr>
+          <p:cNvPr id="23" name="Rectangle 22"/>
           <p:cNvSpPr/>
           <p:nvPr/>
         </p:nvSpPr>
         <p:spPr>
           <a:xfrm>
-            <a:off x="457200" y="5870448"/>
-            <a:ext cx="201168" cy="201168"/>
+            <a:off x="457200" y="4230000"/>
+            <a:ext cx="1097280" cy="550000"/>
           </a:xfrm>
           <a:prstGeom prst="rect">
             <a:avLst/>
           </a:prstGeom>
           <a:solidFill>
-            <a:srgbClr val="CC0000"/>
+            <a:srgbClr val="1A1A2E"/>
           </a:solidFill>
           <a:ln>
             <a:noFill/>
@@ -6378,19 +6826,20 @@
           <a:lstStyle/>
           <a:p>
             <a:pPr algn="ctr"/>
-          </a:p>
-        </p:txBody>
-      </p:sp>
-      <p:sp>
-        <p:nvSpPr>
-          <p:cNvPr id="21" name="TextBox 20"/>
+            <a:endParaRPr/>
+          </a:p>
+        </p:txBody>
+      </p:sp>
+      <p:sp>
+        <p:nvSpPr>
+          <p:cNvPr id="24" name="TextBox 23"/>
           <p:cNvSpPr txBox="1"/>
           <p:nvPr/>
         </p:nvSpPr>
         <p:spPr>
           <a:xfrm>
-            <a:off x="822960" y="5760720"/>
-            <a:ext cx="10881360" cy="502920"/>
+            <a:off x="457200" y="4230000"/>
+            <a:ext cx="1097280" cy="550000"/>
           </a:xfrm>
           <a:prstGeom prst="rect">
             <a:avLst/>
@@ -6403,29 +6852,29 @@
           </a:bodyPr>
           <a:lstStyle/>
           <a:p>
-            <a:pPr algn="l"/>
-            <a:r>
-              <a:rPr sz="1400" b="0">
-                <a:solidFill>
-                  <a:srgbClr val="222222"/>
-                </a:solidFill>
-                <a:latin typeface="Calibri"/>
-              </a:rPr>
-              <a:t>All of this happens automatically with no manual control needed.</a:t>
-            </a:r>
-          </a:p>
-        </p:txBody>
-      </p:sp>
-      <p:sp>
-        <p:nvSpPr>
-          <p:cNvPr id="22" name="TextBox 21"/>
+            <a:pPr algn="ctr"/>
+            <a:r>
+              <a:rPr sz="1200" b="1">
+                <a:solidFill>
+                  <a:srgbClr val="FFFFFF"/>
+                </a:solidFill>
+              </a:rPr>
+              <a:t>Pre-Arrival
+Alert</a:t>
+            </a:r>
+          </a:p>
+        </p:txBody>
+      </p:sp>
+      <p:sp>
+        <p:nvSpPr>
+          <p:cNvPr id="25" name="TextBox 24"/>
           <p:cNvSpPr txBox="1"/>
           <p:nvPr/>
         </p:nvSpPr>
         <p:spPr>
           <a:xfrm>
-            <a:off x="11430000" y="6492240"/>
-            <a:ext cx="640080" cy="274320"/>
+            <a:off x="1737360" y="4250000"/>
+            <a:ext cx="9875520" cy="550000"/>
           </a:xfrm>
           <a:prstGeom prst="rect">
             <a:avLst/>
@@ -6438,13 +6887,385 @@
           </a:bodyPr>
           <a:lstStyle/>
           <a:p>
+            <a:pPr algn="l"/>
+            <a:r>
+              <a:rPr sz="1400" b="0">
+                <a:solidFill>
+                  <a:srgbClr val="222222"/>
+                </a:solidFill>
+              </a:rPr>
+              <a:t>Driver sends a pre-arrival alert with patient summary to the Hospital ER before reaching, so the ER team is ready.</a:t>
+            </a:r>
+          </a:p>
+        </p:txBody>
+      </p:sp>
+      <p:sp>
+        <p:nvSpPr>
+          <p:cNvPr id="26" name="Rectangle 25"/>
+          <p:cNvSpPr/>
+          <p:nvPr/>
+        </p:nvSpPr>
+        <p:spPr>
+          <a:xfrm>
+            <a:off x="457200" y="4822000"/>
+            <a:ext cx="1097280" cy="550000"/>
+          </a:xfrm>
+          <a:prstGeom prst="rect">
+            <a:avLst/>
+          </a:prstGeom>
+          <a:solidFill>
+            <a:srgbClr val="1A1A2E"/>
+          </a:solidFill>
+          <a:ln>
+            <a:noFill/>
+          </a:ln>
+        </p:spPr>
+        <p:style>
+          <a:lnRef idx="1">
+            <a:schemeClr val="accent1"/>
+          </a:lnRef>
+          <a:fillRef idx="3">
+            <a:schemeClr val="accent1"/>
+          </a:fillRef>
+          <a:effectRef idx="2">
+            <a:schemeClr val="accent1"/>
+          </a:effectRef>
+          <a:fontRef idx="minor">
+            <a:schemeClr val="lt1"/>
+          </a:fontRef>
+        </p:style>
+        <p:txBody>
+          <a:bodyPr rtlCol="0" anchor="ctr"/>
+          <a:lstStyle/>
+          <a:p>
+            <a:pPr algn="ctr"/>
+            <a:endParaRPr/>
+          </a:p>
+        </p:txBody>
+      </p:sp>
+      <p:sp>
+        <p:nvSpPr>
+          <p:cNvPr id="27" name="TextBox 26"/>
+          <p:cNvSpPr txBox="1"/>
+          <p:nvPr/>
+        </p:nvSpPr>
+        <p:spPr>
+          <a:xfrm>
+            <a:off x="457200" y="4822000"/>
+            <a:ext cx="1097280" cy="550000"/>
+          </a:xfrm>
+          <a:prstGeom prst="rect">
+            <a:avLst/>
+          </a:prstGeom>
+          <a:noFill/>
+        </p:spPr>
+        <p:txBody>
+          <a:bodyPr wrap="square">
+            <a:spAutoFit/>
+          </a:bodyPr>
+          <a:lstStyle/>
+          <a:p>
+            <a:pPr algn="ctr"/>
+            <a:r>
+              <a:rPr sz="1200" b="1">
+                <a:solidFill>
+                  <a:srgbClr val="FFFFFF"/>
+                </a:solidFill>
+              </a:rPr>
+              <a:t>Download
+PDF</a:t>
+            </a:r>
+          </a:p>
+        </p:txBody>
+      </p:sp>
+      <p:sp>
+        <p:nvSpPr>
+          <p:cNvPr id="28" name="TextBox 27"/>
+          <p:cNvSpPr txBox="1"/>
+          <p:nvPr/>
+        </p:nvSpPr>
+        <p:spPr>
+          <a:xfrm>
+            <a:off x="1737360" y="4842000"/>
+            <a:ext cx="9875520" cy="550000"/>
+          </a:xfrm>
+          <a:prstGeom prst="rect">
+            <a:avLst/>
+          </a:prstGeom>
+          <a:noFill/>
+        </p:spPr>
+        <p:txBody>
+          <a:bodyPr wrap="square">
+            <a:spAutoFit/>
+          </a:bodyPr>
+          <a:lstStyle/>
+          <a:p>
+            <a:pPr algn="l"/>
+            <a:r>
+              <a:rPr sz="1400" b="0">
+                <a:solidFill>
+                  <a:srgbClr val="222222"/>
+                </a:solidFill>
+              </a:rPr>
+              <a:t>Driver can download a full patient vitals report as a PDF after the trip for record-keeping.</a:t>
+            </a:r>
+          </a:p>
+        </p:txBody>
+      </p:sp>
+      <p:sp>
+        <p:nvSpPr>
+          <p:cNvPr id="29" name="Rectangle 28"/>
+          <p:cNvSpPr/>
+          <p:nvPr/>
+        </p:nvSpPr>
+        <p:spPr>
+          <a:xfrm>
+            <a:off x="457200" y="5414000"/>
+            <a:ext cx="1097280" cy="550000"/>
+          </a:xfrm>
+          <a:prstGeom prst="rect">
+            <a:avLst/>
+          </a:prstGeom>
+          <a:solidFill>
+            <a:srgbClr val="1A1A2E"/>
+          </a:solidFill>
+          <a:ln>
+            <a:noFill/>
+          </a:ln>
+        </p:spPr>
+        <p:style>
+          <a:lnRef idx="1">
+            <a:schemeClr val="accent1"/>
+          </a:lnRef>
+          <a:fillRef idx="3">
+            <a:schemeClr val="accent1"/>
+          </a:fillRef>
+          <a:effectRef idx="2">
+            <a:schemeClr val="accent1"/>
+          </a:effectRef>
+          <a:fontRef idx="minor">
+            <a:schemeClr val="lt1"/>
+          </a:fontRef>
+        </p:style>
+        <p:txBody>
+          <a:bodyPr rtlCol="0" anchor="ctr"/>
+          <a:lstStyle/>
+          <a:p>
+            <a:pPr algn="ctr"/>
+            <a:endParaRPr/>
+          </a:p>
+        </p:txBody>
+      </p:sp>
+      <p:sp>
+        <p:nvSpPr>
+          <p:cNvPr id="30" name="TextBox 29"/>
+          <p:cNvSpPr txBox="1"/>
+          <p:nvPr/>
+        </p:nvSpPr>
+        <p:spPr>
+          <a:xfrm>
+            <a:off x="457200" y="5414000"/>
+            <a:ext cx="1097280" cy="550000"/>
+          </a:xfrm>
+          <a:prstGeom prst="rect">
+            <a:avLst/>
+          </a:prstGeom>
+          <a:noFill/>
+        </p:spPr>
+        <p:txBody>
+          <a:bodyPr wrap="square">
+            <a:spAutoFit/>
+          </a:bodyPr>
+          <a:lstStyle/>
+          <a:p>
+            <a:pPr algn="ctr"/>
+            <a:r>
+              <a:rPr sz="1200" b="1">
+                <a:solidFill>
+                  <a:srgbClr val="FFFFFF"/>
+                </a:solidFill>
+              </a:rPr>
+              <a:t>Nearest
+Hospital</a:t>
+            </a:r>
+          </a:p>
+        </p:txBody>
+      </p:sp>
+      <p:sp>
+        <p:nvSpPr>
+          <p:cNvPr id="31" name="TextBox 30"/>
+          <p:cNvSpPr txBox="1"/>
+          <p:nvPr/>
+        </p:nvSpPr>
+        <p:spPr>
+          <a:xfrm>
+            <a:off x="1737360" y="5434000"/>
+            <a:ext cx="9875520" cy="550000"/>
+          </a:xfrm>
+          <a:prstGeom prst="rect">
+            <a:avLst/>
+          </a:prstGeom>
+          <a:noFill/>
+        </p:spPr>
+        <p:txBody>
+          <a:bodyPr wrap="square">
+            <a:spAutoFit/>
+          </a:bodyPr>
+          <a:lstStyle/>
+          <a:p>
+            <a:pPr algn="l"/>
+            <a:r>
+              <a:rPr sz="1400" b="0">
+                <a:solidFill>
+                  <a:srgbClr val="222222"/>
+                </a:solidFill>
+              </a:rPr>
+              <a:t>Driver can view the nearest available hospital to the patient's location in real time, helping choose the fastest and closest destination.</a:t>
+            </a:r>
+          </a:p>
+        </p:txBody>
+      </p:sp>
+      <p:sp>
+        <p:nvSpPr>
+          <p:cNvPr id="32" name="Rectangle 31"/>
+          <p:cNvSpPr/>
+          <p:nvPr/>
+        </p:nvSpPr>
+        <p:spPr>
+          <a:xfrm>
+            <a:off x="457200" y="6006000"/>
+            <a:ext cx="1097280" cy="550000"/>
+          </a:xfrm>
+          <a:prstGeom prst="rect">
+            <a:avLst/>
+          </a:prstGeom>
+          <a:solidFill>
+            <a:srgbClr val="1A1A2E"/>
+          </a:solidFill>
+          <a:ln>
+            <a:noFill/>
+          </a:ln>
+        </p:spPr>
+        <p:style>
+          <a:lnRef idx="1">
+            <a:schemeClr val="accent1"/>
+          </a:lnRef>
+          <a:fillRef idx="3">
+            <a:schemeClr val="accent1"/>
+          </a:fillRef>
+          <a:effectRef idx="2">
+            <a:schemeClr val="accent1"/>
+          </a:effectRef>
+          <a:fontRef idx="minor">
+            <a:schemeClr val="lt1"/>
+          </a:fontRef>
+        </p:style>
+        <p:txBody>
+          <a:bodyPr rtlCol="0" anchor="ctr"/>
+          <a:lstStyle/>
+          <a:p>
+            <a:pPr algn="ctr"/>
+            <a:endParaRPr/>
+          </a:p>
+        </p:txBody>
+      </p:sp>
+      <p:sp>
+        <p:nvSpPr>
+          <p:cNvPr id="33" name="TextBox 32"/>
+          <p:cNvSpPr txBox="1"/>
+          <p:nvPr/>
+        </p:nvSpPr>
+        <p:spPr>
+          <a:xfrm>
+            <a:off x="457200" y="6006000"/>
+            <a:ext cx="1097280" cy="550000"/>
+          </a:xfrm>
+          <a:prstGeom prst="rect">
+            <a:avLst/>
+          </a:prstGeom>
+          <a:noFill/>
+        </p:spPr>
+        <p:txBody>
+          <a:bodyPr wrap="square">
+            <a:spAutoFit/>
+          </a:bodyPr>
+          <a:lstStyle/>
+          <a:p>
+            <a:pPr algn="ctr"/>
+            <a:r>
+              <a:rPr sz="1200" b="1">
+                <a:solidFill>
+                  <a:srgbClr val="FFFFFF"/>
+                </a:solidFill>
+              </a:rPr>
+              <a:t>Hospital
+Contact No</a:t>
+            </a:r>
+          </a:p>
+        </p:txBody>
+      </p:sp>
+      <p:sp>
+        <p:nvSpPr>
+          <p:cNvPr id="34" name="TextBox 33"/>
+          <p:cNvSpPr txBox="1"/>
+          <p:nvPr/>
+        </p:nvSpPr>
+        <p:spPr>
+          <a:xfrm>
+            <a:off x="1737360" y="6026000"/>
+            <a:ext cx="9875520" cy="550000"/>
+          </a:xfrm>
+          <a:prstGeom prst="rect">
+            <a:avLst/>
+          </a:prstGeom>
+          <a:noFill/>
+        </p:spPr>
+        <p:txBody>
+          <a:bodyPr wrap="square">
+            <a:spAutoFit/>
+          </a:bodyPr>
+          <a:lstStyle/>
+          <a:p>
+            <a:pPr algn="l"/>
+            <a:r>
+              <a:rPr sz="1400" b="0">
+                <a:solidFill>
+                  <a:srgbClr val="222222"/>
+                </a:solidFill>
+              </a:rPr>
+              <a:t>Driver can directly view and call the hospital's contact number from the portal to coordinate arrival and ER preparation instantly.</a:t>
+            </a:r>
+          </a:p>
+        </p:txBody>
+      </p:sp>
+      <p:sp>
+        <p:nvSpPr>
+          <p:cNvPr id="35" name="TextBox 34"/>
+          <p:cNvSpPr txBox="1"/>
+          <p:nvPr/>
+        </p:nvSpPr>
+        <p:spPr>
+          <a:xfrm>
+            <a:off x="11430000" y="6492240"/>
+            <a:ext cx="640080" cy="274320"/>
+          </a:xfrm>
+          <a:prstGeom prst="rect">
+            <a:avLst/>
+          </a:prstGeom>
+          <a:noFill/>
+        </p:spPr>
+        <p:txBody>
+          <a:bodyPr wrap="square">
+            <a:spAutoFit/>
+          </a:bodyPr>
+          <a:lstStyle/>
+          <a:p>
             <a:pPr algn="r"/>
             <a:r>
               <a:rPr sz="1000" b="0">
                 <a:solidFill>
                   <a:srgbClr val="999999"/>
                 </a:solidFill>
-                <a:latin typeface="Calibri"/>
               </a:rPr>
               <a:t>5 / 8</a:t>
             </a:r>
@@ -6460,7 +7281,7 @@
 </file>
 
 <file path=ppt/slides/slide6.xml><?xml version="1.0" encoding="utf-8"?>
-<p:sld xmlns:a="http://schemas.openxmlformats.org/drawingml/2006/main" xmlns:p="http://schemas.openxmlformats.org/presentationml/2006/main" xmlns:r="http://schemas.openxmlformats.org/officeDocument/2006/relationships">
+<p:sld xmlns:a="http://schemas.openxmlformats.org/drawingml/2006/main" xmlns:r="http://schemas.openxmlformats.org/officeDocument/2006/relationships" xmlns:p="http://schemas.openxmlformats.org/presentationml/2006/main">
   <p:cSld>
     <p:spTree>
       <p:nvGrpSpPr>
@@ -6468,7 +7289,14 @@
         <p:cNvGrpSpPr/>
         <p:nvPr/>
       </p:nvGrpSpPr>
-      <p:grpSpPr/>
+      <p:grpSpPr>
+        <a:xfrm>
+          <a:off x="0" y="0"/>
+          <a:ext cx="0" cy="0"/>
+          <a:chOff x="0" y="0"/>
+          <a:chExt cx="0" cy="0"/>
+        </a:xfrm>
+      </p:grpSpPr>
       <p:sp>
         <p:nvSpPr>
           <p:cNvPr id="2" name="Rectangle 1"/>
@@ -6509,6 +7337,7 @@
           <a:lstStyle/>
           <a:p>
             <a:pPr algn="ctr"/>
+            <a:endParaRPr/>
           </a:p>
         </p:txBody>
       </p:sp>
@@ -6552,6 +7381,7 @@
           <a:lstStyle/>
           <a:p>
             <a:pPr algn="ctr"/>
+            <a:endParaRPr/>
           </a:p>
         </p:txBody>
       </p:sp>
@@ -6595,6 +7425,7 @@
           <a:lstStyle/>
           <a:p>
             <a:pPr algn="ctr"/>
+            <a:endParaRPr/>
           </a:p>
         </p:txBody>
       </p:sp>
@@ -6673,6 +7504,7 @@
           <a:lstStyle/>
           <a:p>
             <a:pPr algn="ctr"/>
+            <a:endParaRPr/>
           </a:p>
         </p:txBody>
       </p:sp>
@@ -6786,6 +7618,7 @@
           <a:lstStyle/>
           <a:p>
             <a:pPr algn="ctr"/>
+            <a:endParaRPr/>
           </a:p>
         </p:txBody>
       </p:sp>
@@ -7109,6 +7942,7 @@
           <a:lstStyle/>
           <a:p>
             <a:pPr algn="ctr"/>
+            <a:endParaRPr/>
           </a:p>
         </p:txBody>
       </p:sp>
@@ -7156,7 +7990,7 @@
         <p:spPr>
           <a:xfrm>
             <a:off x="6492240" y="3017520"/>
-            <a:ext cx="5029200" cy="365760"/>
+            <a:ext cx="5029200" cy="292388"/>
           </a:xfrm>
           <a:prstGeom prst="rect">
             <a:avLst/>
@@ -7171,7 +8005,7 @@
           <a:p>
             <a:pPr algn="l"/>
             <a:r>
-              <a:rPr sz="1300" b="0">
+              <a:rPr sz="1300" b="0" dirty="0">
                 <a:solidFill>
                   <a:srgbClr val="222222"/>
                 </a:solidFill>
@@ -7179,6 +8013,30 @@
               </a:rPr>
               <a:t>- All vitals update in real time on screen</a:t>
             </a:r>
+            <a:r>
+              <a:rPr lang="en-US" sz="1300" b="0" dirty="0">
+                <a:solidFill>
+                  <a:srgbClr val="222222"/>
+                </a:solidFill>
+                <a:latin typeface="Calibri"/>
+              </a:rPr>
+              <a:t>    using BOOKING </a:t>
+            </a:r>
+            <a:r>
+              <a:rPr lang="en-US" sz="1300" dirty="0">
+                <a:solidFill>
+                  <a:srgbClr val="222222"/>
+                </a:solidFill>
+                <a:latin typeface="Calibri"/>
+              </a:rPr>
+              <a:t>ID</a:t>
+            </a:r>
+            <a:endParaRPr sz="1300" b="0" dirty="0">
+              <a:solidFill>
+                <a:srgbClr val="222222"/>
+              </a:solidFill>
+              <a:latin typeface="Calibri"/>
+            </a:endParaRPr>
           </a:p>
         </p:txBody>
       </p:sp>
@@ -7206,7 +8064,7 @@
           <a:p>
             <a:pPr algn="l"/>
             <a:r>
-              <a:rPr sz="1300" b="0">
+              <a:rPr sz="1300" b="0" dirty="0">
                 <a:solidFill>
                   <a:srgbClr val="222222"/>
                 </a:solidFill>
@@ -7401,7 +8259,7 @@
 </file>
 
 <file path=ppt/slides/slide7.xml><?xml version="1.0" encoding="utf-8"?>
-<p:sld xmlns:a="http://schemas.openxmlformats.org/drawingml/2006/main" xmlns:p="http://schemas.openxmlformats.org/presentationml/2006/main" xmlns:r="http://schemas.openxmlformats.org/officeDocument/2006/relationships">
+<p:sld xmlns:a="http://schemas.openxmlformats.org/drawingml/2006/main" xmlns:r="http://schemas.openxmlformats.org/officeDocument/2006/relationships" xmlns:p="http://schemas.openxmlformats.org/presentationml/2006/main">
   <p:cSld>
     <p:spTree>
       <p:nvGrpSpPr>
@@ -7409,7 +8267,14 @@
         <p:cNvGrpSpPr/>
         <p:nvPr/>
       </p:nvGrpSpPr>
-      <p:grpSpPr/>
+      <p:grpSpPr>
+        <a:xfrm>
+          <a:off x="0" y="0"/>
+          <a:ext cx="0" cy="0"/>
+          <a:chOff x="0" y="0"/>
+          <a:chExt cx="0" cy="0"/>
+        </a:xfrm>
+      </p:grpSpPr>
       <p:sp>
         <p:nvSpPr>
           <p:cNvPr id="2" name="Rectangle 1"/>
@@ -7450,6 +8315,7 @@
           <a:lstStyle/>
           <a:p>
             <a:pPr algn="ctr"/>
+            <a:endParaRPr/>
           </a:p>
         </p:txBody>
       </p:sp>
@@ -7493,6 +8359,7 @@
           <a:lstStyle/>
           <a:p>
             <a:pPr algn="ctr"/>
+            <a:endParaRPr/>
           </a:p>
         </p:txBody>
       </p:sp>
@@ -7536,6 +8403,7 @@
           <a:lstStyle/>
           <a:p>
             <a:pPr algn="ctr"/>
+            <a:endParaRPr/>
           </a:p>
         </p:txBody>
       </p:sp>
@@ -7563,13 +8431,12 @@
           <a:p>
             <a:pPr algn="l"/>
             <a:r>
-              <a:rPr sz="3000" b="1">
+              <a:rPr sz="3200" b="1">
                 <a:solidFill>
                   <a:srgbClr val="1A1A2E"/>
                 </a:solidFill>
-                <a:latin typeface="Calibri"/>
-              </a:rPr>
-              <a:t>What ResQ Can Do — Full Feature List</a:t>
+              </a:rPr>
+              <a:t>Feature 4 — Admin Portal</a:t>
             </a:r>
           </a:p>
         </p:txBody>
@@ -7583,7 +8450,7 @@
         <p:spPr>
           <a:xfrm>
             <a:off x="457200" y="868680"/>
-            <a:ext cx="4572000" cy="36576"/>
+            <a:ext cx="3200400" cy="36576"/>
           </a:xfrm>
           <a:prstGeom prst="rect">
             <a:avLst/>
@@ -7614,6 +8481,7 @@
           <a:lstStyle/>
           <a:p>
             <a:pPr algn="ctr"/>
+            <a:endParaRPr/>
           </a:p>
         </p:txBody>
       </p:sp>
@@ -7625,8 +8493,8 @@
         </p:nvSpPr>
         <p:spPr>
           <a:xfrm>
-            <a:off x="457200" y="1051560"/>
-            <a:ext cx="5486400" cy="5486400"/>
+            <a:off x="457200" y="920000"/>
+            <a:ext cx="10972800" cy="280000"/>
           </a:xfrm>
           <a:prstGeom prst="rect">
             <a:avLst/>
@@ -7639,209 +8507,72 @@
           </a:bodyPr>
           <a:lstStyle/>
           <a:p>
-            <a:pPr algn="l">
-              <a:spcAft>
-                <a:spcPts val="400"/>
-              </a:spcAft>
-            </a:pPr>
-            <a:r>
-              <a:rPr sz="1400" b="1">
-                <a:solidFill>
-                  <a:srgbClr val="222222"/>
-                </a:solidFill>
-                <a:latin typeface="Calibri"/>
-              </a:rPr>
-              <a:t>Patient Side</a:t>
-            </a:r>
-          </a:p>
-          <a:p>
-            <a:pPr algn="l">
-              <a:spcAft>
-                <a:spcPts val="400"/>
-              </a:spcAft>
-            </a:pPr>
-            <a:r>
-              <a:rPr sz="1400" b="0">
-                <a:solidFill>
-                  <a:srgbClr val="222222"/>
-                </a:solidFill>
-                <a:latin typeface="Calibri"/>
-              </a:rPr>
-              <a:t>Auto GPS location detection</a:t>
-            </a:r>
-          </a:p>
-          <a:p>
-            <a:pPr algn="l">
-              <a:spcAft>
-                <a:spcPts val="400"/>
-              </a:spcAft>
-            </a:pPr>
-            <a:r>
-              <a:rPr sz="1400" b="0">
-                <a:solidFill>
-                  <a:srgbClr val="222222"/>
-                </a:solidFill>
-                <a:latin typeface="Calibri"/>
-              </a:rPr>
-              <a:t>8 emergency types to choose from</a:t>
-            </a:r>
-          </a:p>
-          <a:p>
-            <a:pPr algn="l">
-              <a:spcAft>
-                <a:spcPts val="400"/>
-              </a:spcAft>
-            </a:pPr>
-            <a:r>
-              <a:rPr sz="1400" b="0">
-                <a:solidFill>
-                  <a:srgbClr val="222222"/>
-                </a:solidFill>
-                <a:latin typeface="Calibri"/>
-              </a:rPr>
-              <a:t>See nearby ambulances with ETA</a:t>
-            </a:r>
-          </a:p>
-          <a:p>
-            <a:pPr algn="l">
-              <a:spcAft>
-                <a:spcPts val="400"/>
-              </a:spcAft>
-            </a:pPr>
-            <a:r>
-              <a:rPr sz="1400" b="0">
-                <a:solidFill>
-                  <a:srgbClr val="222222"/>
-                </a:solidFill>
-                <a:latin typeface="Calibri"/>
-              </a:rPr>
-              <a:t>Live booking status updates</a:t>
-            </a:r>
-          </a:p>
-          <a:p>
-            <a:pPr algn="l">
-              <a:spcAft>
-                <a:spcPts val="400"/>
-              </a:spcAft>
-            </a:pPr>
-            <a:r>
-              <a:rPr sz="1400" b="0">
-                <a:solidFill>
-                  <a:srgbClr val="222222"/>
-                </a:solidFill>
-                <a:latin typeface="Calibri"/>
-              </a:rPr>
-              <a:t>Full booking history</a:t>
-            </a:r>
-          </a:p>
-          <a:p>
-            <a:pPr algn="l">
-              <a:spcAft>
-                <a:spcPts val="400"/>
-              </a:spcAft>
-            </a:pPr>
-            <a:r>
-              <a:rPr sz="1400" b="0">
-                <a:solidFill>
-                  <a:srgbClr val="222222"/>
-                </a:solidFill>
-                <a:latin typeface="Calibri"/>
-              </a:rPr>
-              <a:t/>
-            </a:r>
-          </a:p>
-          <a:p>
-            <a:pPr algn="l">
-              <a:spcAft>
-                <a:spcPts val="400"/>
-              </a:spcAft>
-            </a:pPr>
-            <a:r>
-              <a:rPr sz="1400" b="1">
-                <a:solidFill>
-                  <a:srgbClr val="222222"/>
-                </a:solidFill>
-                <a:latin typeface="Calibri"/>
-              </a:rPr>
-              <a:t>Admin Side</a:t>
-            </a:r>
-          </a:p>
-          <a:p>
-            <a:pPr algn="l">
-              <a:spcAft>
-                <a:spcPts val="400"/>
-              </a:spcAft>
-            </a:pPr>
-            <a:r>
-              <a:rPr sz="1400" b="0">
-                <a:solidFill>
-                  <a:srgbClr val="222222"/>
-                </a:solidFill>
-                <a:latin typeface="Calibri"/>
-              </a:rPr>
-              <a:t>Live view of all active emergencies</a:t>
-            </a:r>
-          </a:p>
-          <a:p>
-            <a:pPr algn="l">
-              <a:spcAft>
-                <a:spcPts val="400"/>
-              </a:spcAft>
-            </a:pPr>
-            <a:r>
-              <a:rPr sz="1400" b="0">
-                <a:solidFill>
-                  <a:srgbClr val="222222"/>
-                </a:solidFill>
-                <a:latin typeface="Calibri"/>
-              </a:rPr>
-              <a:t>Manage entire ambulance fleet</a:t>
-            </a:r>
-          </a:p>
-          <a:p>
-            <a:pPr algn="l">
-              <a:spcAft>
-                <a:spcPts val="400"/>
-              </a:spcAft>
-            </a:pPr>
-            <a:r>
-              <a:rPr sz="1400" b="0">
-                <a:solidFill>
-                  <a:srgbClr val="222222"/>
-                </a:solidFill>
-                <a:latin typeface="Calibri"/>
-              </a:rPr>
-              <a:t>Add and remove drivers</a:t>
-            </a:r>
-          </a:p>
-          <a:p>
-            <a:pPr algn="l">
-              <a:spcAft>
-                <a:spcPts val="400"/>
-              </a:spcAft>
-            </a:pPr>
-            <a:r>
-              <a:rPr sz="1400" b="0">
-                <a:solidFill>
-                  <a:srgbClr val="222222"/>
-                </a:solidFill>
-                <a:latin typeface="Calibri"/>
-              </a:rPr>
-              <a:t>Analytics and activity logs</a:t>
-            </a:r>
-          </a:p>
-        </p:txBody>
-      </p:sp>
-      <p:sp>
-        <p:nvSpPr>
-          <p:cNvPr id="8" name="TextBox 7"/>
+            <a:pPr algn="l"/>
+            <a:r>
+              <a:rPr sz="1500" b="0">
+                <a:solidFill>
+                  <a:srgbClr val="CC0000"/>
+                </a:solidFill>
+              </a:rPr>
+              <a:t>Complete control and visibility over the entire ResQ system</a:t>
+            </a:r>
+          </a:p>
+        </p:txBody>
+      </p:sp>
+      <p:sp>
+        <p:nvSpPr>
+          <p:cNvPr id="8" name="Rectangle 7"/>
+          <p:cNvSpPr/>
+          <p:nvPr/>
+        </p:nvSpPr>
+        <p:spPr>
+          <a:xfrm>
+            <a:off x="457200" y="1270000"/>
+            <a:ext cx="1097280" cy="524000"/>
+          </a:xfrm>
+          <a:prstGeom prst="rect">
+            <a:avLst/>
+          </a:prstGeom>
+          <a:solidFill>
+            <a:srgbClr val="1A1A2E"/>
+          </a:solidFill>
+          <a:ln>
+            <a:noFill/>
+          </a:ln>
+        </p:spPr>
+        <p:style>
+          <a:lnRef idx="1">
+            <a:schemeClr val="accent1"/>
+          </a:lnRef>
+          <a:fillRef idx="3">
+            <a:schemeClr val="accent1"/>
+          </a:fillRef>
+          <a:effectRef idx="2">
+            <a:schemeClr val="accent1"/>
+          </a:effectRef>
+          <a:fontRef idx="minor">
+            <a:schemeClr val="lt1"/>
+          </a:fontRef>
+        </p:style>
+        <p:txBody>
+          <a:bodyPr rtlCol="0" anchor="ctr"/>
+          <a:lstStyle/>
+          <a:p>
+            <a:pPr algn="ctr"/>
+            <a:endParaRPr/>
+          </a:p>
+        </p:txBody>
+      </p:sp>
+      <p:sp>
+        <p:nvSpPr>
+          <p:cNvPr id="9" name="TextBox 8"/>
           <p:cNvSpPr txBox="1"/>
           <p:nvPr/>
         </p:nvSpPr>
         <p:spPr>
           <a:xfrm>
-            <a:off x="6309360" y="1051560"/>
-            <a:ext cx="5486400" cy="5486400"/>
+            <a:off x="457200" y="1270000"/>
+            <a:ext cx="1097280" cy="524000"/>
           </a:xfrm>
           <a:prstGeom prst="rect">
             <a:avLst/>
@@ -7854,241 +8585,29 @@
           </a:bodyPr>
           <a:lstStyle/>
           <a:p>
-            <a:pPr algn="l">
-              <a:spcAft>
-                <a:spcPts val="400"/>
-              </a:spcAft>
-            </a:pPr>
-            <a:r>
-              <a:rPr sz="1400" b="1">
-                <a:solidFill>
-                  <a:srgbClr val="222222"/>
-                </a:solidFill>
-                <a:latin typeface="Calibri"/>
-              </a:rPr>
-              <a:t>Driver Side</a:t>
-            </a:r>
-          </a:p>
-          <a:p>
-            <a:pPr algn="l">
-              <a:spcAft>
-                <a:spcPts val="400"/>
-              </a:spcAft>
-            </a:pPr>
-            <a:r>
-              <a:rPr sz="1400" b="0">
-                <a:solidFill>
-                  <a:srgbClr val="222222"/>
-                </a:solidFill>
-                <a:latin typeface="Calibri"/>
-              </a:rPr>
-              <a:t>Receive emergency requests live</a:t>
-            </a:r>
-          </a:p>
-          <a:p>
-            <a:pPr algn="l">
-              <a:spcAft>
-                <a:spcPts val="400"/>
-              </a:spcAft>
-            </a:pPr>
-            <a:r>
-              <a:rPr sz="1400" b="0">
-                <a:solidFill>
-                  <a:srgbClr val="222222"/>
-                </a:solidFill>
-                <a:latin typeface="Calibri"/>
-              </a:rPr>
-              <a:t>Accept or reject bookings</a:t>
-            </a:r>
-          </a:p>
-          <a:p>
-            <a:pPr algn="l">
-              <a:spcAft>
-                <a:spcPts val="400"/>
-              </a:spcAft>
-            </a:pPr>
-            <a:r>
-              <a:rPr sz="1400" b="0">
-                <a:solidFill>
-                  <a:srgbClr val="222222"/>
-                </a:solidFill>
-                <a:latin typeface="Calibri"/>
-              </a:rPr>
-              <a:t>GPS navigation to patient</a:t>
-            </a:r>
-          </a:p>
-          <a:p>
-            <a:pPr algn="l">
-              <a:spcAft>
-                <a:spcPts val="400"/>
-              </a:spcAft>
-            </a:pPr>
-            <a:r>
-              <a:rPr sz="1400" b="0">
-                <a:solidFill>
-                  <a:srgbClr val="222222"/>
-                </a:solidFill>
-                <a:latin typeface="Calibri"/>
-              </a:rPr>
-              <a:t>Green Corridor — auto traffic clearance</a:t>
-            </a:r>
-          </a:p>
-          <a:p>
-            <a:pPr algn="l">
-              <a:spcAft>
-                <a:spcPts val="400"/>
-              </a:spcAft>
-            </a:pPr>
-            <a:r>
-              <a:rPr sz="1400" b="0">
-                <a:solidFill>
-                  <a:srgbClr val="222222"/>
-                </a:solidFill>
-                <a:latin typeface="Calibri"/>
-              </a:rPr>
-              <a:t>Enter and send patient vitals to ER</a:t>
-            </a:r>
-          </a:p>
-          <a:p>
-            <a:pPr algn="l">
-              <a:spcAft>
-                <a:spcPts val="400"/>
-              </a:spcAft>
-            </a:pPr>
-            <a:r>
-              <a:rPr sz="1400" b="0">
-                <a:solidFill>
-                  <a:srgbClr val="222222"/>
-                </a:solidFill>
-                <a:latin typeface="Calibri"/>
-              </a:rPr>
-              <a:t>Stream live ECG to hospital</a:t>
-            </a:r>
-          </a:p>
-          <a:p>
-            <a:pPr algn="l">
-              <a:spcAft>
-                <a:spcPts val="400"/>
-              </a:spcAft>
-            </a:pPr>
-            <a:r>
-              <a:rPr sz="1400" b="0">
-                <a:solidFill>
-                  <a:srgbClr val="222222"/>
-                </a:solidFill>
-                <a:latin typeface="Calibri"/>
-              </a:rPr>
-              <a:t>Send pre-arrival alert to hospital</a:t>
-            </a:r>
-          </a:p>
-          <a:p>
-            <a:pPr algn="l">
-              <a:spcAft>
-                <a:spcPts val="400"/>
-              </a:spcAft>
-            </a:pPr>
-            <a:r>
-              <a:rPr sz="1400" b="0">
-                <a:solidFill>
-                  <a:srgbClr val="222222"/>
-                </a:solidFill>
-                <a:latin typeface="Calibri"/>
-              </a:rPr>
-              <a:t>Download patient vitals as PDF report</a:t>
-            </a:r>
-          </a:p>
-          <a:p>
-            <a:pPr algn="l">
-              <a:spcAft>
-                <a:spcPts val="400"/>
-              </a:spcAft>
-            </a:pPr>
-            <a:r>
-              <a:rPr sz="1400" b="0">
-                <a:solidFill>
-                  <a:srgbClr val="222222"/>
-                </a:solidFill>
-                <a:latin typeface="Calibri"/>
-              </a:rPr>
-              <a:t/>
-            </a:r>
-          </a:p>
-          <a:p>
-            <a:pPr algn="l">
-              <a:spcAft>
-                <a:spcPts val="400"/>
-              </a:spcAft>
-            </a:pPr>
-            <a:r>
-              <a:rPr sz="1400" b="1">
-                <a:solidFill>
-                  <a:srgbClr val="222222"/>
-                </a:solidFill>
-                <a:latin typeface="Calibri"/>
-              </a:rPr>
-              <a:t>Hospital Side</a:t>
-            </a:r>
-          </a:p>
-          <a:p>
-            <a:pPr algn="l">
-              <a:spcAft>
-                <a:spcPts val="400"/>
-              </a:spcAft>
-            </a:pPr>
-            <a:r>
-              <a:rPr sz="1400" b="0">
-                <a:solidFill>
-                  <a:srgbClr val="222222"/>
-                </a:solidFill>
-                <a:latin typeface="Calibri"/>
-              </a:rPr>
-              <a:t>Live vitals and ECG monitor</a:t>
-            </a:r>
-          </a:p>
-          <a:p>
-            <a:pPr algn="l">
-              <a:spcAft>
-                <a:spcPts val="400"/>
-              </a:spcAft>
-            </a:pPr>
-            <a:r>
-              <a:rPr sz="1400" b="0">
-                <a:solidFill>
-                  <a:srgbClr val="222222"/>
-                </a:solidFill>
-                <a:latin typeface="Calibri"/>
-              </a:rPr>
-              <a:t>Pre-alert inbox before patient arrives</a:t>
-            </a:r>
-          </a:p>
-          <a:p>
-            <a:pPr algn="l">
-              <a:spcAft>
-                <a:spcPts val="400"/>
-              </a:spcAft>
-            </a:pPr>
-            <a:r>
-              <a:rPr sz="1400" b="0">
-                <a:solidFill>
-                  <a:srgbClr val="222222"/>
-                </a:solidFill>
-                <a:latin typeface="Calibri"/>
-              </a:rPr>
-              <a:t>One-click ER preparation actions</a:t>
-            </a:r>
-          </a:p>
-        </p:txBody>
-      </p:sp>
-      <p:sp>
-        <p:nvSpPr>
-          <p:cNvPr id="9" name="TextBox 8"/>
+            <a:pPr algn="ctr"/>
+            <a:r>
+              <a:rPr sz="1200" b="1">
+                <a:solidFill>
+                  <a:srgbClr val="FFFFFF"/>
+                </a:solidFill>
+              </a:rPr>
+              <a:t>Live
+Emergencies</a:t>
+            </a:r>
+          </a:p>
+        </p:txBody>
+      </p:sp>
+      <p:sp>
+        <p:nvSpPr>
+          <p:cNvPr id="10" name="TextBox 9"/>
           <p:cNvSpPr txBox="1"/>
           <p:nvPr/>
         </p:nvSpPr>
         <p:spPr>
           <a:xfrm>
-            <a:off x="11430000" y="6492240"/>
-            <a:ext cx="640080" cy="274320"/>
+            <a:off x="1737360" y="1285000"/>
+            <a:ext cx="9875520" cy="524000"/>
           </a:xfrm>
           <a:prstGeom prst="rect">
             <a:avLst/>
@@ -8101,15 +8620,951 @@
           </a:bodyPr>
           <a:lstStyle/>
           <a:p>
+            <a:pPr algn="l"/>
+            <a:r>
+              <a:rPr sz="1400" b="0">
+                <a:solidFill>
+                  <a:srgbClr val="222222"/>
+                </a:solidFill>
+              </a:rPr>
+              <a:t>Admin sees all active emergency bookings in real time — patient location, assigned driver, and current status on a live dashboard.</a:t>
+            </a:r>
+          </a:p>
+        </p:txBody>
+      </p:sp>
+      <p:sp>
+        <p:nvSpPr>
+          <p:cNvPr id="11" name="Rectangle 10"/>
+          <p:cNvSpPr/>
+          <p:nvPr/>
+        </p:nvSpPr>
+        <p:spPr>
+          <a:xfrm>
+            <a:off x="457200" y="1830000"/>
+            <a:ext cx="1097280" cy="524000"/>
+          </a:xfrm>
+          <a:prstGeom prst="rect">
+            <a:avLst/>
+          </a:prstGeom>
+          <a:solidFill>
+            <a:srgbClr val="1A1A2E"/>
+          </a:solidFill>
+          <a:ln>
+            <a:noFill/>
+          </a:ln>
+        </p:spPr>
+        <p:style>
+          <a:lnRef idx="1">
+            <a:schemeClr val="accent1"/>
+          </a:lnRef>
+          <a:fillRef idx="3">
+            <a:schemeClr val="accent1"/>
+          </a:fillRef>
+          <a:effectRef idx="2">
+            <a:schemeClr val="accent1"/>
+          </a:effectRef>
+          <a:fontRef idx="minor">
+            <a:schemeClr val="lt1"/>
+          </a:fontRef>
+        </p:style>
+        <p:txBody>
+          <a:bodyPr rtlCol="0" anchor="ctr"/>
+          <a:lstStyle/>
+          <a:p>
+            <a:pPr algn="ctr"/>
+            <a:endParaRPr/>
+          </a:p>
+        </p:txBody>
+      </p:sp>
+      <p:sp>
+        <p:nvSpPr>
+          <p:cNvPr id="12" name="TextBox 11"/>
+          <p:cNvSpPr txBox="1"/>
+          <p:nvPr/>
+        </p:nvSpPr>
+        <p:spPr>
+          <a:xfrm>
+            <a:off x="457200" y="1830000"/>
+            <a:ext cx="1097280" cy="524000"/>
+          </a:xfrm>
+          <a:prstGeom prst="rect">
+            <a:avLst/>
+          </a:prstGeom>
+          <a:noFill/>
+        </p:spPr>
+        <p:txBody>
+          <a:bodyPr wrap="square">
+            <a:spAutoFit/>
+          </a:bodyPr>
+          <a:lstStyle/>
+          <a:p>
+            <a:pPr algn="ctr"/>
+            <a:r>
+              <a:rPr sz="1200" b="1">
+                <a:solidFill>
+                  <a:srgbClr val="FFFFFF"/>
+                </a:solidFill>
+              </a:rPr>
+              <a:t>Fleet
+Management</a:t>
+            </a:r>
+          </a:p>
+        </p:txBody>
+      </p:sp>
+      <p:sp>
+        <p:nvSpPr>
+          <p:cNvPr id="13" name="TextBox 12"/>
+          <p:cNvSpPr txBox="1"/>
+          <p:nvPr/>
+        </p:nvSpPr>
+        <p:spPr>
+          <a:xfrm>
+            <a:off x="1737360" y="1845000"/>
+            <a:ext cx="9875520" cy="524000"/>
+          </a:xfrm>
+          <a:prstGeom prst="rect">
+            <a:avLst/>
+          </a:prstGeom>
+          <a:noFill/>
+        </p:spPr>
+        <p:txBody>
+          <a:bodyPr wrap="square">
+            <a:spAutoFit/>
+          </a:bodyPr>
+          <a:lstStyle/>
+          <a:p>
+            <a:pPr algn="l"/>
+            <a:r>
+              <a:rPr sz="1400" b="0">
+                <a:solidFill>
+                  <a:srgbClr val="222222"/>
+                </a:solidFill>
+              </a:rPr>
+              <a:t>Admin can view and manage the entire ambulance fleet — availability status, driver assignments, and ambulance details.</a:t>
+            </a:r>
+          </a:p>
+        </p:txBody>
+      </p:sp>
+      <p:sp>
+        <p:nvSpPr>
+          <p:cNvPr id="14" name="Rectangle 13"/>
+          <p:cNvSpPr/>
+          <p:nvPr/>
+        </p:nvSpPr>
+        <p:spPr>
+          <a:xfrm>
+            <a:off x="457200" y="2390000"/>
+            <a:ext cx="1097280" cy="524000"/>
+          </a:xfrm>
+          <a:prstGeom prst="rect">
+            <a:avLst/>
+          </a:prstGeom>
+          <a:solidFill>
+            <a:srgbClr val="1A1A2E"/>
+          </a:solidFill>
+          <a:ln>
+            <a:noFill/>
+          </a:ln>
+        </p:spPr>
+        <p:style>
+          <a:lnRef idx="1">
+            <a:schemeClr val="accent1"/>
+          </a:lnRef>
+          <a:fillRef idx="3">
+            <a:schemeClr val="accent1"/>
+          </a:fillRef>
+          <a:effectRef idx="2">
+            <a:schemeClr val="accent1"/>
+          </a:effectRef>
+          <a:fontRef idx="minor">
+            <a:schemeClr val="lt1"/>
+          </a:fontRef>
+        </p:style>
+        <p:txBody>
+          <a:bodyPr rtlCol="0" anchor="ctr"/>
+          <a:lstStyle/>
+          <a:p>
+            <a:pPr algn="ctr"/>
+            <a:endParaRPr/>
+          </a:p>
+        </p:txBody>
+      </p:sp>
+      <p:sp>
+        <p:nvSpPr>
+          <p:cNvPr id="15" name="TextBox 14"/>
+          <p:cNvSpPr txBox="1"/>
+          <p:nvPr/>
+        </p:nvSpPr>
+        <p:spPr>
+          <a:xfrm>
+            <a:off x="457200" y="2390000"/>
+            <a:ext cx="1097280" cy="524000"/>
+          </a:xfrm>
+          <a:prstGeom prst="rect">
+            <a:avLst/>
+          </a:prstGeom>
+          <a:noFill/>
+        </p:spPr>
+        <p:txBody>
+          <a:bodyPr wrap="square">
+            <a:spAutoFit/>
+          </a:bodyPr>
+          <a:lstStyle/>
+          <a:p>
+            <a:pPr algn="ctr"/>
+            <a:r>
+              <a:rPr sz="1200" b="1">
+                <a:solidFill>
+                  <a:srgbClr val="FFFFFF"/>
+                </a:solidFill>
+              </a:rPr>
+              <a:t>Add / Remove
+Drivers</a:t>
+            </a:r>
+          </a:p>
+        </p:txBody>
+      </p:sp>
+      <p:sp>
+        <p:nvSpPr>
+          <p:cNvPr id="16" name="TextBox 15"/>
+          <p:cNvSpPr txBox="1"/>
+          <p:nvPr/>
+        </p:nvSpPr>
+        <p:spPr>
+          <a:xfrm>
+            <a:off x="1737360" y="2405000"/>
+            <a:ext cx="9875520" cy="524000"/>
+          </a:xfrm>
+          <a:prstGeom prst="rect">
+            <a:avLst/>
+          </a:prstGeom>
+          <a:noFill/>
+        </p:spPr>
+        <p:txBody>
+          <a:bodyPr wrap="square">
+            <a:spAutoFit/>
+          </a:bodyPr>
+          <a:lstStyle/>
+          <a:p>
+            <a:pPr algn="l"/>
+            <a:r>
+              <a:rPr sz="1400" b="0">
+                <a:solidFill>
+                  <a:srgbClr val="222222"/>
+                </a:solidFill>
+              </a:rPr>
+              <a:t>Admin can add new drivers to the system or remove existing ones, keeping the driver roster always up to date.</a:t>
+            </a:r>
+          </a:p>
+        </p:txBody>
+      </p:sp>
+      <p:sp>
+        <p:nvSpPr>
+          <p:cNvPr id="17" name="Rectangle 16"/>
+          <p:cNvSpPr/>
+          <p:nvPr/>
+        </p:nvSpPr>
+        <p:spPr>
+          <a:xfrm>
+            <a:off x="457200" y="2950000"/>
+            <a:ext cx="1097280" cy="524000"/>
+          </a:xfrm>
+          <a:prstGeom prst="rect">
+            <a:avLst/>
+          </a:prstGeom>
+          <a:solidFill>
+            <a:srgbClr val="1A1A2E"/>
+          </a:solidFill>
+          <a:ln>
+            <a:noFill/>
+          </a:ln>
+        </p:spPr>
+        <p:style>
+          <a:lnRef idx="1">
+            <a:schemeClr val="accent1"/>
+          </a:lnRef>
+          <a:fillRef idx="3">
+            <a:schemeClr val="accent1"/>
+          </a:fillRef>
+          <a:effectRef idx="2">
+            <a:schemeClr val="accent1"/>
+          </a:effectRef>
+          <a:fontRef idx="minor">
+            <a:schemeClr val="lt1"/>
+          </a:fontRef>
+        </p:style>
+        <p:txBody>
+          <a:bodyPr rtlCol="0" anchor="ctr"/>
+          <a:lstStyle/>
+          <a:p>
+            <a:pPr algn="ctr"/>
+            <a:endParaRPr/>
+          </a:p>
+        </p:txBody>
+      </p:sp>
+      <p:sp>
+        <p:nvSpPr>
+          <p:cNvPr id="18" name="TextBox 17"/>
+          <p:cNvSpPr txBox="1"/>
+          <p:nvPr/>
+        </p:nvSpPr>
+        <p:spPr>
+          <a:xfrm>
+            <a:off x="457200" y="2950000"/>
+            <a:ext cx="1097280" cy="524000"/>
+          </a:xfrm>
+          <a:prstGeom prst="rect">
+            <a:avLst/>
+          </a:prstGeom>
+          <a:noFill/>
+        </p:spPr>
+        <p:txBody>
+          <a:bodyPr wrap="square">
+            <a:spAutoFit/>
+          </a:bodyPr>
+          <a:lstStyle/>
+          <a:p>
+            <a:pPr algn="ctr"/>
+            <a:r>
+              <a:rPr sz="1200" b="1">
+                <a:solidFill>
+                  <a:srgbClr val="FFFFFF"/>
+                </a:solidFill>
+              </a:rPr>
+              <a:t>Driver
+Management</a:t>
+            </a:r>
+          </a:p>
+        </p:txBody>
+      </p:sp>
+      <p:sp>
+        <p:nvSpPr>
+          <p:cNvPr id="19" name="TextBox 18"/>
+          <p:cNvSpPr txBox="1"/>
+          <p:nvPr/>
+        </p:nvSpPr>
+        <p:spPr>
+          <a:xfrm>
+            <a:off x="1737360" y="2965000"/>
+            <a:ext cx="9875520" cy="524000"/>
+          </a:xfrm>
+          <a:prstGeom prst="rect">
+            <a:avLst/>
+          </a:prstGeom>
+          <a:noFill/>
+        </p:spPr>
+        <p:txBody>
+          <a:bodyPr wrap="square">
+            <a:spAutoFit/>
+          </a:bodyPr>
+          <a:lstStyle/>
+          <a:p>
+            <a:pPr algn="l"/>
+            <a:r>
+              <a:rPr sz="1400" b="0">
+                <a:solidFill>
+                  <a:srgbClr val="222222"/>
+                </a:solidFill>
+              </a:rPr>
+              <a:t>Admin can monitor all drivers — view their active bookings, location, and performance from a single panel.</a:t>
+            </a:r>
+          </a:p>
+        </p:txBody>
+      </p:sp>
+      <p:sp>
+        <p:nvSpPr>
+          <p:cNvPr id="20" name="Rectangle 19"/>
+          <p:cNvSpPr/>
+          <p:nvPr/>
+        </p:nvSpPr>
+        <p:spPr>
+          <a:xfrm>
+            <a:off x="457200" y="3510000"/>
+            <a:ext cx="1097280" cy="524000"/>
+          </a:xfrm>
+          <a:prstGeom prst="rect">
+            <a:avLst/>
+          </a:prstGeom>
+          <a:solidFill>
+            <a:srgbClr val="1A1A2E"/>
+          </a:solidFill>
+          <a:ln>
+            <a:noFill/>
+          </a:ln>
+        </p:spPr>
+        <p:style>
+          <a:lnRef idx="1">
+            <a:schemeClr val="accent1"/>
+          </a:lnRef>
+          <a:fillRef idx="3">
+            <a:schemeClr val="accent1"/>
+          </a:fillRef>
+          <a:effectRef idx="2">
+            <a:schemeClr val="accent1"/>
+          </a:effectRef>
+          <a:fontRef idx="minor">
+            <a:schemeClr val="lt1"/>
+          </a:fontRef>
+        </p:style>
+        <p:txBody>
+          <a:bodyPr rtlCol="0" anchor="ctr"/>
+          <a:lstStyle/>
+          <a:p>
+            <a:pPr algn="ctr"/>
+            <a:endParaRPr/>
+          </a:p>
+        </p:txBody>
+      </p:sp>
+      <p:sp>
+        <p:nvSpPr>
+          <p:cNvPr id="21" name="TextBox 20"/>
+          <p:cNvSpPr txBox="1"/>
+          <p:nvPr/>
+        </p:nvSpPr>
+        <p:spPr>
+          <a:xfrm>
+            <a:off x="457200" y="3510000"/>
+            <a:ext cx="1097280" cy="524000"/>
+          </a:xfrm>
+          <a:prstGeom prst="rect">
+            <a:avLst/>
+          </a:prstGeom>
+          <a:noFill/>
+        </p:spPr>
+        <p:txBody>
+          <a:bodyPr wrap="square">
+            <a:spAutoFit/>
+          </a:bodyPr>
+          <a:lstStyle/>
+          <a:p>
+            <a:pPr algn="ctr"/>
+            <a:r>
+              <a:rPr sz="1200" b="1">
+                <a:solidFill>
+                  <a:srgbClr val="FFFFFF"/>
+                </a:solidFill>
+              </a:rPr>
+              <a:t>Customer
+Management</a:t>
+            </a:r>
+          </a:p>
+        </p:txBody>
+      </p:sp>
+      <p:sp>
+        <p:nvSpPr>
+          <p:cNvPr id="22" name="TextBox 21"/>
+          <p:cNvSpPr txBox="1"/>
+          <p:nvPr/>
+        </p:nvSpPr>
+        <p:spPr>
+          <a:xfrm>
+            <a:off x="1737360" y="3525000"/>
+            <a:ext cx="9875520" cy="524000"/>
+          </a:xfrm>
+          <a:prstGeom prst="rect">
+            <a:avLst/>
+          </a:prstGeom>
+          <a:noFill/>
+        </p:spPr>
+        <p:txBody>
+          <a:bodyPr wrap="square">
+            <a:spAutoFit/>
+          </a:bodyPr>
+          <a:lstStyle/>
+          <a:p>
+            <a:pPr algn="l"/>
+            <a:r>
+              <a:rPr sz="1400" b="0">
+                <a:solidFill>
+                  <a:srgbClr val="222222"/>
+                </a:solidFill>
+              </a:rPr>
+              <a:t>Admin can view all registered customers, their booking history, and account details for full user oversight.</a:t>
+            </a:r>
+          </a:p>
+        </p:txBody>
+      </p:sp>
+      <p:sp>
+        <p:nvSpPr>
+          <p:cNvPr id="23" name="Rectangle 22"/>
+          <p:cNvSpPr/>
+          <p:nvPr/>
+        </p:nvSpPr>
+        <p:spPr>
+          <a:xfrm>
+            <a:off x="457200" y="4070000"/>
+            <a:ext cx="1097280" cy="524000"/>
+          </a:xfrm>
+          <a:prstGeom prst="rect">
+            <a:avLst/>
+          </a:prstGeom>
+          <a:solidFill>
+            <a:srgbClr val="1A1A2E"/>
+          </a:solidFill>
+          <a:ln>
+            <a:noFill/>
+          </a:ln>
+        </p:spPr>
+        <p:style>
+          <a:lnRef idx="1">
+            <a:schemeClr val="accent1"/>
+          </a:lnRef>
+          <a:fillRef idx="3">
+            <a:schemeClr val="accent1"/>
+          </a:fillRef>
+          <a:effectRef idx="2">
+            <a:schemeClr val="accent1"/>
+          </a:effectRef>
+          <a:fontRef idx="minor">
+            <a:schemeClr val="lt1"/>
+          </a:fontRef>
+        </p:style>
+        <p:txBody>
+          <a:bodyPr rtlCol="0" anchor="ctr"/>
+          <a:lstStyle/>
+          <a:p>
+            <a:pPr algn="ctr"/>
+            <a:endParaRPr/>
+          </a:p>
+        </p:txBody>
+      </p:sp>
+      <p:sp>
+        <p:nvSpPr>
+          <p:cNvPr id="24" name="TextBox 23"/>
+          <p:cNvSpPr txBox="1"/>
+          <p:nvPr/>
+        </p:nvSpPr>
+        <p:spPr>
+          <a:xfrm>
+            <a:off x="457200" y="4070000"/>
+            <a:ext cx="1097280" cy="524000"/>
+          </a:xfrm>
+          <a:prstGeom prst="rect">
+            <a:avLst/>
+          </a:prstGeom>
+          <a:noFill/>
+        </p:spPr>
+        <p:txBody>
+          <a:bodyPr wrap="square">
+            <a:spAutoFit/>
+          </a:bodyPr>
+          <a:lstStyle/>
+          <a:p>
+            <a:pPr algn="ctr"/>
+            <a:r>
+              <a:rPr sz="1200" b="1">
+                <a:solidFill>
+                  <a:srgbClr val="FFFFFF"/>
+                </a:solidFill>
+              </a:rPr>
+              <a:t>Hospital
+Management</a:t>
+            </a:r>
+          </a:p>
+        </p:txBody>
+      </p:sp>
+      <p:sp>
+        <p:nvSpPr>
+          <p:cNvPr id="25" name="TextBox 24"/>
+          <p:cNvSpPr txBox="1"/>
+          <p:nvPr/>
+        </p:nvSpPr>
+        <p:spPr>
+          <a:xfrm>
+            <a:off x="1737360" y="4085000"/>
+            <a:ext cx="9875520" cy="524000"/>
+          </a:xfrm>
+          <a:prstGeom prst="rect">
+            <a:avLst/>
+          </a:prstGeom>
+          <a:noFill/>
+        </p:spPr>
+        <p:txBody>
+          <a:bodyPr wrap="square">
+            <a:spAutoFit/>
+          </a:bodyPr>
+          <a:lstStyle/>
+          <a:p>
+            <a:pPr algn="l"/>
+            <a:r>
+              <a:rPr sz="1400" b="0">
+                <a:solidFill>
+                  <a:srgbClr val="222222"/>
+                </a:solidFill>
+              </a:rPr>
+              <a:t>Admin can manage hospital records — add, update, or remove hospitals and their contact information from the system.</a:t>
+            </a:r>
+          </a:p>
+        </p:txBody>
+      </p:sp>
+      <p:sp>
+        <p:nvSpPr>
+          <p:cNvPr id="26" name="Rectangle 25"/>
+          <p:cNvSpPr/>
+          <p:nvPr/>
+        </p:nvSpPr>
+        <p:spPr>
+          <a:xfrm>
+            <a:off x="457200" y="4630000"/>
+            <a:ext cx="1097280" cy="524000"/>
+          </a:xfrm>
+          <a:prstGeom prst="rect">
+            <a:avLst/>
+          </a:prstGeom>
+          <a:solidFill>
+            <a:srgbClr val="1A1A2E"/>
+          </a:solidFill>
+          <a:ln>
+            <a:noFill/>
+          </a:ln>
+        </p:spPr>
+        <p:style>
+          <a:lnRef idx="1">
+            <a:schemeClr val="accent1"/>
+          </a:lnRef>
+          <a:fillRef idx="3">
+            <a:schemeClr val="accent1"/>
+          </a:fillRef>
+          <a:effectRef idx="2">
+            <a:schemeClr val="accent1"/>
+          </a:effectRef>
+          <a:fontRef idx="minor">
+            <a:schemeClr val="lt1"/>
+          </a:fontRef>
+        </p:style>
+        <p:txBody>
+          <a:bodyPr rtlCol="0" anchor="ctr"/>
+          <a:lstStyle/>
+          <a:p>
+            <a:pPr algn="ctr"/>
+            <a:endParaRPr/>
+          </a:p>
+        </p:txBody>
+      </p:sp>
+      <p:sp>
+        <p:nvSpPr>
+          <p:cNvPr id="27" name="TextBox 26"/>
+          <p:cNvSpPr txBox="1"/>
+          <p:nvPr/>
+        </p:nvSpPr>
+        <p:spPr>
+          <a:xfrm>
+            <a:off x="457200" y="4630000"/>
+            <a:ext cx="1097280" cy="524000"/>
+          </a:xfrm>
+          <a:prstGeom prst="rect">
+            <a:avLst/>
+          </a:prstGeom>
+          <a:noFill/>
+        </p:spPr>
+        <p:txBody>
+          <a:bodyPr wrap="square">
+            <a:spAutoFit/>
+          </a:bodyPr>
+          <a:lstStyle/>
+          <a:p>
+            <a:pPr algn="ctr"/>
+            <a:r>
+              <a:rPr sz="1200" b="1">
+                <a:solidFill>
+                  <a:srgbClr val="FFFFFF"/>
+                </a:solidFill>
+              </a:rPr>
+              <a:t>Analytics &amp;
+Logs</a:t>
+            </a:r>
+          </a:p>
+        </p:txBody>
+      </p:sp>
+      <p:sp>
+        <p:nvSpPr>
+          <p:cNvPr id="28" name="TextBox 27"/>
+          <p:cNvSpPr txBox="1"/>
+          <p:nvPr/>
+        </p:nvSpPr>
+        <p:spPr>
+          <a:xfrm>
+            <a:off x="1737360" y="4645000"/>
+            <a:ext cx="9875520" cy="524000"/>
+          </a:xfrm>
+          <a:prstGeom prst="rect">
+            <a:avLst/>
+          </a:prstGeom>
+          <a:noFill/>
+        </p:spPr>
+        <p:txBody>
+          <a:bodyPr wrap="square">
+            <a:spAutoFit/>
+          </a:bodyPr>
+          <a:lstStyle/>
+          <a:p>
+            <a:pPr algn="l"/>
+            <a:r>
+              <a:rPr sz="1400" b="0">
+                <a:solidFill>
+                  <a:srgbClr val="222222"/>
+                </a:solidFill>
+              </a:rPr>
+              <a:t>Admin has access to full analytics — booking trends, response times, driver performance — and detailed activity logs for audit.</a:t>
+            </a:r>
+          </a:p>
+        </p:txBody>
+      </p:sp>
+      <p:sp>
+        <p:nvSpPr>
+          <p:cNvPr id="29" name="Rectangle 28"/>
+          <p:cNvSpPr/>
+          <p:nvPr/>
+        </p:nvSpPr>
+        <p:spPr>
+          <a:xfrm>
+            <a:off x="457200" y="5190000"/>
+            <a:ext cx="1097280" cy="524000"/>
+          </a:xfrm>
+          <a:prstGeom prst="rect">
+            <a:avLst/>
+          </a:prstGeom>
+          <a:solidFill>
+            <a:srgbClr val="1A1A2E"/>
+          </a:solidFill>
+          <a:ln>
+            <a:noFill/>
+          </a:ln>
+        </p:spPr>
+        <p:style>
+          <a:lnRef idx="1">
+            <a:schemeClr val="accent1"/>
+          </a:lnRef>
+          <a:fillRef idx="3">
+            <a:schemeClr val="accent1"/>
+          </a:fillRef>
+          <a:effectRef idx="2">
+            <a:schemeClr val="accent1"/>
+          </a:effectRef>
+          <a:fontRef idx="minor">
+            <a:schemeClr val="lt1"/>
+          </a:fontRef>
+        </p:style>
+        <p:txBody>
+          <a:bodyPr rtlCol="0" anchor="ctr"/>
+          <a:lstStyle/>
+          <a:p>
+            <a:pPr algn="ctr"/>
+            <a:endParaRPr/>
+          </a:p>
+        </p:txBody>
+      </p:sp>
+      <p:sp>
+        <p:nvSpPr>
+          <p:cNvPr id="30" name="TextBox 29"/>
+          <p:cNvSpPr txBox="1"/>
+          <p:nvPr/>
+        </p:nvSpPr>
+        <p:spPr>
+          <a:xfrm>
+            <a:off x="457200" y="5190000"/>
+            <a:ext cx="1097280" cy="524000"/>
+          </a:xfrm>
+          <a:prstGeom prst="rect">
+            <a:avLst/>
+          </a:prstGeom>
+          <a:noFill/>
+        </p:spPr>
+        <p:txBody>
+          <a:bodyPr wrap="square">
+            <a:spAutoFit/>
+          </a:bodyPr>
+          <a:lstStyle/>
+          <a:p>
+            <a:pPr algn="ctr"/>
+            <a:r>
+              <a:rPr sz="1200" b="1">
+                <a:solidFill>
+                  <a:srgbClr val="FFFFFF"/>
+                </a:solidFill>
+              </a:rPr>
+              <a:t>Live Map</a:t>
+            </a:r>
+          </a:p>
+        </p:txBody>
+      </p:sp>
+      <p:sp>
+        <p:nvSpPr>
+          <p:cNvPr id="31" name="TextBox 30"/>
+          <p:cNvSpPr txBox="1"/>
+          <p:nvPr/>
+        </p:nvSpPr>
+        <p:spPr>
+          <a:xfrm>
+            <a:off x="1737360" y="5205000"/>
+            <a:ext cx="9875520" cy="524000"/>
+          </a:xfrm>
+          <a:prstGeom prst="rect">
+            <a:avLst/>
+          </a:prstGeom>
+          <a:noFill/>
+        </p:spPr>
+        <p:txBody>
+          <a:bodyPr wrap="square">
+            <a:spAutoFit/>
+          </a:bodyPr>
+          <a:lstStyle/>
+          <a:p>
+            <a:pPr algn="l"/>
+            <a:r>
+              <a:rPr sz="1400" b="0">
+                <a:solidFill>
+                  <a:srgbClr val="222222"/>
+                </a:solidFill>
+              </a:rPr>
+              <a:t>Admin can see a live map showing all ambulances, active emergencies, and hospital locations in real time across the city.</a:t>
+            </a:r>
+          </a:p>
+        </p:txBody>
+      </p:sp>
+      <p:sp>
+        <p:nvSpPr>
+          <p:cNvPr id="32" name="Rectangle 31"/>
+          <p:cNvSpPr/>
+          <p:nvPr/>
+        </p:nvSpPr>
+        <p:spPr>
+          <a:xfrm>
+            <a:off x="457200" y="5750000"/>
+            <a:ext cx="1097280" cy="524000"/>
+          </a:xfrm>
+          <a:prstGeom prst="rect">
+            <a:avLst/>
+          </a:prstGeom>
+          <a:solidFill>
+            <a:srgbClr val="1A1A2E"/>
+          </a:solidFill>
+          <a:ln>
+            <a:noFill/>
+          </a:ln>
+        </p:spPr>
+        <p:style>
+          <a:lnRef idx="1">
+            <a:schemeClr val="accent1"/>
+          </a:lnRef>
+          <a:fillRef idx="3">
+            <a:schemeClr val="accent1"/>
+          </a:fillRef>
+          <a:effectRef idx="2">
+            <a:schemeClr val="accent1"/>
+          </a:effectRef>
+          <a:fontRef idx="minor">
+            <a:schemeClr val="lt1"/>
+          </a:fontRef>
+        </p:style>
+        <p:txBody>
+          <a:bodyPr rtlCol="0" anchor="ctr"/>
+          <a:lstStyle/>
+          <a:p>
+            <a:pPr algn="ctr"/>
+            <a:endParaRPr/>
+          </a:p>
+        </p:txBody>
+      </p:sp>
+      <p:sp>
+        <p:nvSpPr>
+          <p:cNvPr id="33" name="TextBox 32"/>
+          <p:cNvSpPr txBox="1"/>
+          <p:nvPr/>
+        </p:nvSpPr>
+        <p:spPr>
+          <a:xfrm>
+            <a:off x="457200" y="5750000"/>
+            <a:ext cx="1097280" cy="524000"/>
+          </a:xfrm>
+          <a:prstGeom prst="rect">
+            <a:avLst/>
+          </a:prstGeom>
+          <a:noFill/>
+        </p:spPr>
+        <p:txBody>
+          <a:bodyPr wrap="square">
+            <a:spAutoFit/>
+          </a:bodyPr>
+          <a:lstStyle/>
+          <a:p>
+            <a:pPr algn="ctr"/>
+            <a:r>
+              <a:rPr sz="1200" b="1">
+                <a:solidFill>
+                  <a:srgbClr val="FFFFFF"/>
+                </a:solidFill>
+              </a:rPr>
+              <a:t>System
+Management</a:t>
+            </a:r>
+          </a:p>
+        </p:txBody>
+      </p:sp>
+      <p:sp>
+        <p:nvSpPr>
+          <p:cNvPr id="34" name="TextBox 33"/>
+          <p:cNvSpPr txBox="1"/>
+          <p:nvPr/>
+        </p:nvSpPr>
+        <p:spPr>
+          <a:xfrm>
+            <a:off x="1737360" y="5765000"/>
+            <a:ext cx="9875520" cy="524000"/>
+          </a:xfrm>
+          <a:prstGeom prst="rect">
+            <a:avLst/>
+          </a:prstGeom>
+          <a:noFill/>
+        </p:spPr>
+        <p:txBody>
+          <a:bodyPr wrap="square">
+            <a:spAutoFit/>
+          </a:bodyPr>
+          <a:lstStyle/>
+          <a:p>
+            <a:pPr algn="l"/>
+            <a:r>
+              <a:rPr sz="1400" b="0">
+                <a:solidFill>
+                  <a:srgbClr val="222222"/>
+                </a:solidFill>
+              </a:rPr>
+              <a:t>Admin controls system-wide settings — manage users, roles, and overall platform configuration from one place.</a:t>
+            </a:r>
+          </a:p>
+        </p:txBody>
+      </p:sp>
+      <p:sp>
+        <p:nvSpPr>
+          <p:cNvPr id="35" name="TextBox 34"/>
+          <p:cNvSpPr txBox="1"/>
+          <p:nvPr/>
+        </p:nvSpPr>
+        <p:spPr>
+          <a:xfrm>
+            <a:off x="11430000" y="6492240"/>
+            <a:ext cx="640080" cy="274320"/>
+          </a:xfrm>
+          <a:prstGeom prst="rect">
+            <a:avLst/>
+          </a:prstGeom>
+          <a:noFill/>
+        </p:spPr>
+        <p:txBody>
+          <a:bodyPr wrap="square">
+            <a:spAutoFit/>
+          </a:bodyPr>
+          <a:lstStyle/>
+          <a:p>
             <a:pPr algn="r"/>
             <a:r>
               <a:rPr sz="1000" b="0">
                 <a:solidFill>
                   <a:srgbClr val="999999"/>
                 </a:solidFill>
-                <a:latin typeface="Calibri"/>
-              </a:rPr>
-              <a:t>7 / 8</a:t>
+              </a:rPr>
+              <a:t>7 / 9</a:t>
             </a:r>
           </a:p>
         </p:txBody>
@@ -8123,7 +9578,7 @@
 </file>
 
 <file path=ppt/slides/slide8.xml><?xml version="1.0" encoding="utf-8"?>
-<p:sld xmlns:a="http://schemas.openxmlformats.org/drawingml/2006/main" xmlns:p="http://schemas.openxmlformats.org/presentationml/2006/main" xmlns:r="http://schemas.openxmlformats.org/officeDocument/2006/relationships">
+<p:sld xmlns:a="http://schemas.openxmlformats.org/drawingml/2006/main" xmlns:r="http://schemas.openxmlformats.org/officeDocument/2006/relationships" xmlns:p="http://schemas.openxmlformats.org/presentationml/2006/main">
   <p:cSld>
     <p:spTree>
       <p:nvGrpSpPr>
@@ -8131,7 +9586,14 @@
         <p:cNvGrpSpPr/>
         <p:nvPr/>
       </p:nvGrpSpPr>
-      <p:grpSpPr/>
+      <p:grpSpPr>
+        <a:xfrm>
+          <a:off x="0" y="0"/>
+          <a:ext cx="0" cy="0"/>
+          <a:chOff x="0" y="0"/>
+          <a:chExt cx="0" cy="0"/>
+        </a:xfrm>
+      </p:grpSpPr>
       <p:sp>
         <p:nvSpPr>
           <p:cNvPr id="2" name="Rectangle 1"/>
@@ -8172,6 +9634,7 @@
           <a:lstStyle/>
           <a:p>
             <a:pPr algn="ctr"/>
+            <a:endParaRPr/>
           </a:p>
         </p:txBody>
       </p:sp>
@@ -8215,6 +9678,7 @@
           <a:lstStyle/>
           <a:p>
             <a:pPr algn="ctr"/>
+            <a:endParaRPr/>
           </a:p>
         </p:txBody>
       </p:sp>
@@ -8258,6 +9722,7 @@
           <a:lstStyle/>
           <a:p>
             <a:pPr algn="ctr"/>
+            <a:endParaRPr/>
           </a:p>
         </p:txBody>
       </p:sp>
@@ -8285,13 +9750,13 @@
           <a:p>
             <a:pPr algn="l"/>
             <a:r>
-              <a:rPr sz="3200" b="1">
+              <a:rPr sz="3000" b="1">
                 <a:solidFill>
                   <a:srgbClr val="1A1A2E"/>
                 </a:solidFill>
                 <a:latin typeface="Calibri"/>
               </a:rPr>
-              <a:t>Problem vs Solution</a:t>
+              <a:t>What ResQ Can Do — Full Feature List</a:t>
             </a:r>
           </a:p>
         </p:txBody>
@@ -8305,7 +9770,7 @@
         <p:spPr>
           <a:xfrm>
             <a:off x="457200" y="868680"/>
-            <a:ext cx="2743200" cy="36576"/>
+            <a:ext cx="4572000" cy="36576"/>
           </a:xfrm>
           <a:prstGeom prst="rect">
             <a:avLst/>
@@ -8336,6 +9801,734 @@
           <a:lstStyle/>
           <a:p>
             <a:pPr algn="ctr"/>
+            <a:endParaRPr/>
+          </a:p>
+        </p:txBody>
+      </p:sp>
+      <p:sp>
+        <p:nvSpPr>
+          <p:cNvPr id="7" name="TextBox 6"/>
+          <p:cNvSpPr txBox="1"/>
+          <p:nvPr/>
+        </p:nvSpPr>
+        <p:spPr>
+          <a:xfrm>
+            <a:off x="457200" y="1051560"/>
+            <a:ext cx="5486400" cy="5486400"/>
+          </a:xfrm>
+          <a:prstGeom prst="rect">
+            <a:avLst/>
+          </a:prstGeom>
+          <a:noFill/>
+        </p:spPr>
+        <p:txBody>
+          <a:bodyPr wrap="square">
+            <a:spAutoFit/>
+          </a:bodyPr>
+          <a:lstStyle/>
+          <a:p>
+            <a:pPr algn="l">
+              <a:spcAft>
+                <a:spcPts val="400"/>
+              </a:spcAft>
+            </a:pPr>
+            <a:r>
+              <a:rPr sz="1400" b="1">
+                <a:solidFill>
+                  <a:srgbClr val="222222"/>
+                </a:solidFill>
+                <a:latin typeface="Calibri"/>
+              </a:rPr>
+              <a:t>Patient Side</a:t>
+            </a:r>
+          </a:p>
+          <a:p>
+            <a:pPr algn="l">
+              <a:spcAft>
+                <a:spcPts val="400"/>
+              </a:spcAft>
+            </a:pPr>
+            <a:r>
+              <a:rPr sz="1400" b="0">
+                <a:solidFill>
+                  <a:srgbClr val="222222"/>
+                </a:solidFill>
+                <a:latin typeface="Calibri"/>
+              </a:rPr>
+              <a:t>Auto GPS location detection</a:t>
+            </a:r>
+          </a:p>
+          <a:p>
+            <a:pPr algn="l">
+              <a:spcAft>
+                <a:spcPts val="400"/>
+              </a:spcAft>
+            </a:pPr>
+            <a:r>
+              <a:rPr sz="1400" b="0">
+                <a:solidFill>
+                  <a:srgbClr val="222222"/>
+                </a:solidFill>
+                <a:latin typeface="Calibri"/>
+              </a:rPr>
+              <a:t>8 emergency types to choose from</a:t>
+            </a:r>
+          </a:p>
+          <a:p>
+            <a:pPr algn="l">
+              <a:spcAft>
+                <a:spcPts val="400"/>
+              </a:spcAft>
+            </a:pPr>
+            <a:r>
+              <a:rPr sz="1400" b="0">
+                <a:solidFill>
+                  <a:srgbClr val="222222"/>
+                </a:solidFill>
+                <a:latin typeface="Calibri"/>
+              </a:rPr>
+              <a:t>See nearby ambulances with ETA</a:t>
+            </a:r>
+          </a:p>
+          <a:p>
+            <a:pPr algn="l">
+              <a:spcAft>
+                <a:spcPts val="400"/>
+              </a:spcAft>
+            </a:pPr>
+            <a:r>
+              <a:rPr sz="1400" b="0">
+                <a:solidFill>
+                  <a:srgbClr val="222222"/>
+                </a:solidFill>
+                <a:latin typeface="Calibri"/>
+              </a:rPr>
+              <a:t>Live booking status updates</a:t>
+            </a:r>
+          </a:p>
+          <a:p>
+            <a:pPr algn="l">
+              <a:spcAft>
+                <a:spcPts val="400"/>
+              </a:spcAft>
+            </a:pPr>
+            <a:r>
+              <a:rPr sz="1400" b="0">
+                <a:solidFill>
+                  <a:srgbClr val="222222"/>
+                </a:solidFill>
+                <a:latin typeface="Calibri"/>
+              </a:rPr>
+              <a:t>Full booking history</a:t>
+            </a:r>
+          </a:p>
+          <a:p>
+            <a:pPr algn="l">
+              <a:spcAft>
+                <a:spcPts val="400"/>
+              </a:spcAft>
+            </a:pPr>
+            <a:endParaRPr sz="1400" b="0">
+              <a:solidFill>
+                <a:srgbClr val="222222"/>
+              </a:solidFill>
+              <a:latin typeface="Calibri"/>
+            </a:endParaRPr>
+          </a:p>
+          <a:p>
+            <a:pPr algn="l">
+              <a:spcAft>
+                <a:spcPts val="400"/>
+              </a:spcAft>
+            </a:pPr>
+            <a:r>
+              <a:rPr sz="1400" b="1">
+                <a:solidFill>
+                  <a:srgbClr val="222222"/>
+                </a:solidFill>
+                <a:latin typeface="Calibri"/>
+              </a:rPr>
+              <a:t>Admin Side</a:t>
+            </a:r>
+          </a:p>
+          <a:p>
+            <a:pPr algn="l">
+              <a:spcAft>
+                <a:spcPts val="400"/>
+              </a:spcAft>
+            </a:pPr>
+            <a:r>
+              <a:rPr sz="1400" b="0">
+                <a:solidFill>
+                  <a:srgbClr val="222222"/>
+                </a:solidFill>
+                <a:latin typeface="Calibri"/>
+              </a:rPr>
+              <a:t>Live view of all active emergencies</a:t>
+            </a:r>
+          </a:p>
+          <a:p>
+            <a:pPr algn="l">
+              <a:spcAft>
+                <a:spcPts val="400"/>
+              </a:spcAft>
+            </a:pPr>
+            <a:r>
+              <a:rPr sz="1400" b="0">
+                <a:solidFill>
+                  <a:srgbClr val="222222"/>
+                </a:solidFill>
+                <a:latin typeface="Calibri"/>
+              </a:rPr>
+              <a:t>Manage entire ambulance fleet</a:t>
+            </a:r>
+          </a:p>
+          <a:p>
+            <a:pPr algn="l">
+              <a:spcAft>
+                <a:spcPts val="400"/>
+              </a:spcAft>
+            </a:pPr>
+            <a:r>
+              <a:rPr sz="1400" b="0">
+                <a:solidFill>
+                  <a:srgbClr val="222222"/>
+                </a:solidFill>
+                <a:latin typeface="Calibri"/>
+              </a:rPr>
+              <a:t>Add and remove drivers</a:t>
+            </a:r>
+          </a:p>
+          <a:p>
+            <a:pPr algn="l">
+              <a:spcAft>
+                <a:spcPts val="400"/>
+              </a:spcAft>
+            </a:pPr>
+            <a:r>
+              <a:rPr sz="1400" b="0">
+                <a:solidFill>
+                  <a:srgbClr val="222222"/>
+                </a:solidFill>
+                <a:latin typeface="Calibri"/>
+              </a:rPr>
+              <a:t>Analytics and activity logs</a:t>
+            </a:r>
+          </a:p>
+        </p:txBody>
+      </p:sp>
+      <p:sp>
+        <p:nvSpPr>
+          <p:cNvPr id="8" name="TextBox 7"/>
+          <p:cNvSpPr txBox="1"/>
+          <p:nvPr/>
+        </p:nvSpPr>
+        <p:spPr>
+          <a:xfrm>
+            <a:off x="6309360" y="1051560"/>
+            <a:ext cx="5486400" cy="5486400"/>
+          </a:xfrm>
+          <a:prstGeom prst="rect">
+            <a:avLst/>
+          </a:prstGeom>
+          <a:noFill/>
+        </p:spPr>
+        <p:txBody>
+          <a:bodyPr wrap="square">
+            <a:spAutoFit/>
+          </a:bodyPr>
+          <a:lstStyle/>
+          <a:p>
+            <a:pPr algn="l">
+              <a:spcAft>
+                <a:spcPts val="400"/>
+              </a:spcAft>
+            </a:pPr>
+            <a:r>
+              <a:rPr sz="1400" b="1">
+                <a:solidFill>
+                  <a:srgbClr val="222222"/>
+                </a:solidFill>
+                <a:latin typeface="Calibri"/>
+              </a:rPr>
+              <a:t>Driver Side</a:t>
+            </a:r>
+          </a:p>
+          <a:p>
+            <a:pPr algn="l">
+              <a:spcAft>
+                <a:spcPts val="400"/>
+              </a:spcAft>
+            </a:pPr>
+            <a:r>
+              <a:rPr sz="1400" b="0">
+                <a:solidFill>
+                  <a:srgbClr val="222222"/>
+                </a:solidFill>
+                <a:latin typeface="Calibri"/>
+              </a:rPr>
+              <a:t>Receive emergency requests live</a:t>
+            </a:r>
+          </a:p>
+          <a:p>
+            <a:pPr algn="l">
+              <a:spcAft>
+                <a:spcPts val="400"/>
+              </a:spcAft>
+            </a:pPr>
+            <a:r>
+              <a:rPr sz="1400" b="0">
+                <a:solidFill>
+                  <a:srgbClr val="222222"/>
+                </a:solidFill>
+                <a:latin typeface="Calibri"/>
+              </a:rPr>
+              <a:t>Accept or reject bookings</a:t>
+            </a:r>
+          </a:p>
+          <a:p>
+            <a:pPr algn="l">
+              <a:spcAft>
+                <a:spcPts val="400"/>
+              </a:spcAft>
+            </a:pPr>
+            <a:r>
+              <a:rPr sz="1400" b="0">
+                <a:solidFill>
+                  <a:srgbClr val="222222"/>
+                </a:solidFill>
+                <a:latin typeface="Calibri"/>
+              </a:rPr>
+              <a:t>GPS navigation to patient</a:t>
+            </a:r>
+          </a:p>
+          <a:p>
+            <a:pPr algn="l">
+              <a:spcAft>
+                <a:spcPts val="400"/>
+              </a:spcAft>
+            </a:pPr>
+            <a:r>
+              <a:rPr sz="1400" b="0">
+                <a:solidFill>
+                  <a:srgbClr val="222222"/>
+                </a:solidFill>
+                <a:latin typeface="Calibri"/>
+              </a:rPr>
+              <a:t>Green Corridor — auto traffic clearance</a:t>
+            </a:r>
+          </a:p>
+          <a:p>
+            <a:pPr algn="l">
+              <a:spcAft>
+                <a:spcPts val="400"/>
+              </a:spcAft>
+            </a:pPr>
+            <a:r>
+              <a:rPr sz="1400" b="0">
+                <a:solidFill>
+                  <a:srgbClr val="222222"/>
+                </a:solidFill>
+                <a:latin typeface="Calibri"/>
+              </a:rPr>
+              <a:t>Enter and send patient vitals to ER</a:t>
+            </a:r>
+          </a:p>
+          <a:p>
+            <a:pPr algn="l">
+              <a:spcAft>
+                <a:spcPts val="400"/>
+              </a:spcAft>
+            </a:pPr>
+            <a:r>
+              <a:rPr sz="1400" b="0">
+                <a:solidFill>
+                  <a:srgbClr val="222222"/>
+                </a:solidFill>
+                <a:latin typeface="Calibri"/>
+              </a:rPr>
+              <a:t>Stream live ECG to hospital</a:t>
+            </a:r>
+          </a:p>
+          <a:p>
+            <a:pPr algn="l">
+              <a:spcAft>
+                <a:spcPts val="400"/>
+              </a:spcAft>
+            </a:pPr>
+            <a:r>
+              <a:rPr sz="1400" b="0">
+                <a:solidFill>
+                  <a:srgbClr val="222222"/>
+                </a:solidFill>
+                <a:latin typeface="Calibri"/>
+              </a:rPr>
+              <a:t>Send pre-arrival alert to hospital</a:t>
+            </a:r>
+          </a:p>
+          <a:p>
+            <a:pPr algn="l">
+              <a:spcAft>
+                <a:spcPts val="400"/>
+              </a:spcAft>
+            </a:pPr>
+            <a:r>
+              <a:rPr sz="1400" b="0">
+                <a:solidFill>
+                  <a:srgbClr val="222222"/>
+                </a:solidFill>
+                <a:latin typeface="Calibri"/>
+              </a:rPr>
+              <a:t>Download patient vitals as PDF report</a:t>
+            </a:r>
+          </a:p>
+          <a:p>
+            <a:pPr algn="l">
+              <a:spcAft>
+                <a:spcPts val="400"/>
+              </a:spcAft>
+            </a:pPr>
+            <a:endParaRPr sz="1400" b="0">
+              <a:solidFill>
+                <a:srgbClr val="222222"/>
+              </a:solidFill>
+              <a:latin typeface="Calibri"/>
+            </a:endParaRPr>
+          </a:p>
+          <a:p>
+            <a:pPr algn="l">
+              <a:spcAft>
+                <a:spcPts val="400"/>
+              </a:spcAft>
+            </a:pPr>
+            <a:r>
+              <a:rPr sz="1400" b="1">
+                <a:solidFill>
+                  <a:srgbClr val="222222"/>
+                </a:solidFill>
+                <a:latin typeface="Calibri"/>
+              </a:rPr>
+              <a:t>Hospital Side</a:t>
+            </a:r>
+          </a:p>
+          <a:p>
+            <a:pPr algn="l">
+              <a:spcAft>
+                <a:spcPts val="400"/>
+              </a:spcAft>
+            </a:pPr>
+            <a:r>
+              <a:rPr sz="1400" b="0">
+                <a:solidFill>
+                  <a:srgbClr val="222222"/>
+                </a:solidFill>
+                <a:latin typeface="Calibri"/>
+              </a:rPr>
+              <a:t>Live vitals and ECG monitor</a:t>
+            </a:r>
+          </a:p>
+          <a:p>
+            <a:pPr algn="l">
+              <a:spcAft>
+                <a:spcPts val="400"/>
+              </a:spcAft>
+            </a:pPr>
+            <a:r>
+              <a:rPr sz="1400" b="0">
+                <a:solidFill>
+                  <a:srgbClr val="222222"/>
+                </a:solidFill>
+                <a:latin typeface="Calibri"/>
+              </a:rPr>
+              <a:t>Pre-alert inbox before patient arrives</a:t>
+            </a:r>
+          </a:p>
+          <a:p>
+            <a:pPr algn="l">
+              <a:spcAft>
+                <a:spcPts val="400"/>
+              </a:spcAft>
+            </a:pPr>
+            <a:r>
+              <a:rPr sz="1400" b="0">
+                <a:solidFill>
+                  <a:srgbClr val="222222"/>
+                </a:solidFill>
+                <a:latin typeface="Calibri"/>
+              </a:rPr>
+              <a:t>One-click ER preparation actions</a:t>
+            </a:r>
+          </a:p>
+        </p:txBody>
+      </p:sp>
+      <p:sp>
+        <p:nvSpPr>
+          <p:cNvPr id="9" name="TextBox 8"/>
+          <p:cNvSpPr txBox="1"/>
+          <p:nvPr/>
+        </p:nvSpPr>
+        <p:spPr>
+          <a:xfrm>
+            <a:off x="11430000" y="6492240"/>
+            <a:ext cx="640080" cy="274320"/>
+          </a:xfrm>
+          <a:prstGeom prst="rect">
+            <a:avLst/>
+          </a:prstGeom>
+          <a:noFill/>
+        </p:spPr>
+        <p:txBody>
+          <a:bodyPr wrap="square">
+            <a:spAutoFit/>
+          </a:bodyPr>
+          <a:lstStyle/>
+          <a:p>
+            <a:pPr algn="r"/>
+            <a:r>
+              <a:rPr sz="1000" b="0">
+                <a:solidFill>
+                  <a:srgbClr val="999999"/>
+                </a:solidFill>
+                <a:latin typeface="Calibri"/>
+              </a:rPr>
+              <a:t>7 / 8</a:t>
+            </a:r>
+          </a:p>
+        </p:txBody>
+      </p:sp>
+    </p:spTree>
+  </p:cSld>
+  <p:clrMapOvr>
+    <a:masterClrMapping/>
+  </p:clrMapOvr>
+</p:sld>
+</file>
+
+<file path=ppt/slides/slide9.xml><?xml version="1.0" encoding="utf-8"?>
+<p:sld xmlns:a="http://schemas.openxmlformats.org/drawingml/2006/main" xmlns:r="http://schemas.openxmlformats.org/officeDocument/2006/relationships" xmlns:p="http://schemas.openxmlformats.org/presentationml/2006/main">
+  <p:cSld>
+    <p:spTree>
+      <p:nvGrpSpPr>
+        <p:cNvPr id="1" name=""/>
+        <p:cNvGrpSpPr/>
+        <p:nvPr/>
+      </p:nvGrpSpPr>
+      <p:grpSpPr>
+        <a:xfrm>
+          <a:off x="0" y="0"/>
+          <a:ext cx="0" cy="0"/>
+          <a:chOff x="0" y="0"/>
+          <a:chExt cx="0" cy="0"/>
+        </a:xfrm>
+      </p:grpSpPr>
+      <p:sp>
+        <p:nvSpPr>
+          <p:cNvPr id="2" name="Rectangle 1"/>
+          <p:cNvSpPr/>
+          <p:nvPr/>
+        </p:nvSpPr>
+        <p:spPr>
+          <a:xfrm>
+            <a:off x="0" y="0"/>
+            <a:ext cx="12188952" cy="6858000"/>
+          </a:xfrm>
+          <a:prstGeom prst="rect">
+            <a:avLst/>
+          </a:prstGeom>
+          <a:solidFill>
+            <a:srgbClr val="FFFFFF"/>
+          </a:solidFill>
+          <a:ln>
+            <a:noFill/>
+          </a:ln>
+        </p:spPr>
+        <p:style>
+          <a:lnRef idx="1">
+            <a:schemeClr val="accent1"/>
+          </a:lnRef>
+          <a:fillRef idx="3">
+            <a:schemeClr val="accent1"/>
+          </a:fillRef>
+          <a:effectRef idx="2">
+            <a:schemeClr val="accent1"/>
+          </a:effectRef>
+          <a:fontRef idx="minor">
+            <a:schemeClr val="lt1"/>
+          </a:fontRef>
+        </p:style>
+        <p:txBody>
+          <a:bodyPr rtlCol="0" anchor="ctr"/>
+          <a:lstStyle/>
+          <a:p>
+            <a:pPr algn="ctr"/>
+            <a:endParaRPr/>
+          </a:p>
+        </p:txBody>
+      </p:sp>
+      <p:sp>
+        <p:nvSpPr>
+          <p:cNvPr id="3" name="Rectangle 2"/>
+          <p:cNvSpPr/>
+          <p:nvPr/>
+        </p:nvSpPr>
+        <p:spPr>
+          <a:xfrm>
+            <a:off x="0" y="0"/>
+            <a:ext cx="12188952" cy="73152"/>
+          </a:xfrm>
+          <a:prstGeom prst="rect">
+            <a:avLst/>
+          </a:prstGeom>
+          <a:solidFill>
+            <a:srgbClr val="CC0000"/>
+          </a:solidFill>
+          <a:ln>
+            <a:noFill/>
+          </a:ln>
+        </p:spPr>
+        <p:style>
+          <a:lnRef idx="1">
+            <a:schemeClr val="accent1"/>
+          </a:lnRef>
+          <a:fillRef idx="3">
+            <a:schemeClr val="accent1"/>
+          </a:fillRef>
+          <a:effectRef idx="2">
+            <a:schemeClr val="accent1"/>
+          </a:effectRef>
+          <a:fontRef idx="minor">
+            <a:schemeClr val="lt1"/>
+          </a:fontRef>
+        </p:style>
+        <p:txBody>
+          <a:bodyPr rtlCol="0" anchor="ctr"/>
+          <a:lstStyle/>
+          <a:p>
+            <a:pPr algn="ctr"/>
+            <a:endParaRPr/>
+          </a:p>
+        </p:txBody>
+      </p:sp>
+      <p:sp>
+        <p:nvSpPr>
+          <p:cNvPr id="4" name="Rectangle 3"/>
+          <p:cNvSpPr/>
+          <p:nvPr/>
+        </p:nvSpPr>
+        <p:spPr>
+          <a:xfrm>
+            <a:off x="0" y="6784848"/>
+            <a:ext cx="12188952" cy="73152"/>
+          </a:xfrm>
+          <a:prstGeom prst="rect">
+            <a:avLst/>
+          </a:prstGeom>
+          <a:solidFill>
+            <a:srgbClr val="CC0000"/>
+          </a:solidFill>
+          <a:ln>
+            <a:noFill/>
+          </a:ln>
+        </p:spPr>
+        <p:style>
+          <a:lnRef idx="1">
+            <a:schemeClr val="accent1"/>
+          </a:lnRef>
+          <a:fillRef idx="3">
+            <a:schemeClr val="accent1"/>
+          </a:fillRef>
+          <a:effectRef idx="2">
+            <a:schemeClr val="accent1"/>
+          </a:effectRef>
+          <a:fontRef idx="minor">
+            <a:schemeClr val="lt1"/>
+          </a:fontRef>
+        </p:style>
+        <p:txBody>
+          <a:bodyPr rtlCol="0" anchor="ctr"/>
+          <a:lstStyle/>
+          <a:p>
+            <a:pPr algn="ctr"/>
+            <a:endParaRPr/>
+          </a:p>
+        </p:txBody>
+      </p:sp>
+      <p:sp>
+        <p:nvSpPr>
+          <p:cNvPr id="5" name="TextBox 4"/>
+          <p:cNvSpPr txBox="1"/>
+          <p:nvPr/>
+        </p:nvSpPr>
+        <p:spPr>
+          <a:xfrm>
+            <a:off x="457200" y="228600"/>
+            <a:ext cx="10972800" cy="640080"/>
+          </a:xfrm>
+          <a:prstGeom prst="rect">
+            <a:avLst/>
+          </a:prstGeom>
+          <a:noFill/>
+        </p:spPr>
+        <p:txBody>
+          <a:bodyPr wrap="square">
+            <a:spAutoFit/>
+          </a:bodyPr>
+          <a:lstStyle/>
+          <a:p>
+            <a:pPr algn="l"/>
+            <a:r>
+              <a:rPr sz="3200" b="1">
+                <a:solidFill>
+                  <a:srgbClr val="1A1A2E"/>
+                </a:solidFill>
+                <a:latin typeface="Calibri"/>
+              </a:rPr>
+              <a:t>Problem vs Solution</a:t>
+            </a:r>
+          </a:p>
+        </p:txBody>
+      </p:sp>
+      <p:sp>
+        <p:nvSpPr>
+          <p:cNvPr id="6" name="Rectangle 5"/>
+          <p:cNvSpPr/>
+          <p:nvPr/>
+        </p:nvSpPr>
+        <p:spPr>
+          <a:xfrm>
+            <a:off x="457200" y="868680"/>
+            <a:ext cx="2743200" cy="36576"/>
+          </a:xfrm>
+          <a:prstGeom prst="rect">
+            <a:avLst/>
+          </a:prstGeom>
+          <a:solidFill>
+            <a:srgbClr val="CC0000"/>
+          </a:solidFill>
+          <a:ln>
+            <a:noFill/>
+          </a:ln>
+        </p:spPr>
+        <p:style>
+          <a:lnRef idx="1">
+            <a:schemeClr val="accent1"/>
+          </a:lnRef>
+          <a:fillRef idx="3">
+            <a:schemeClr val="accent1"/>
+          </a:fillRef>
+          <a:effectRef idx="2">
+            <a:schemeClr val="accent1"/>
+          </a:effectRef>
+          <a:fontRef idx="minor">
+            <a:schemeClr val="lt1"/>
+          </a:fontRef>
+        </p:style>
+        <p:txBody>
+          <a:bodyPr rtlCol="0" anchor="ctr"/>
+          <a:lstStyle/>
+          <a:p>
+            <a:pPr algn="ctr"/>
+            <a:endParaRPr/>
           </a:p>
         </p:txBody>
       </p:sp>
@@ -8379,6 +10572,7 @@
           <a:lstStyle/>
           <a:p>
             <a:pPr algn="ctr"/>
+            <a:endParaRPr/>
           </a:p>
         </p:txBody>
       </p:sp>
@@ -8422,6 +10616,7 @@
           <a:lstStyle/>
           <a:p>
             <a:pPr algn="ctr"/>
+            <a:endParaRPr/>
           </a:p>
         </p:txBody>
       </p:sp>
@@ -8535,6 +10730,7 @@
           <a:lstStyle/>
           <a:p>
             <a:pPr algn="ctr"/>
+            <a:endParaRPr/>
           </a:p>
         </p:txBody>
       </p:sp>
@@ -8578,6 +10774,7 @@
           <a:lstStyle/>
           <a:p>
             <a:pPr algn="ctr"/>
+            <a:endParaRPr/>
           </a:p>
         </p:txBody>
       </p:sp>
@@ -8691,6 +10888,7 @@
           <a:lstStyle/>
           <a:p>
             <a:pPr algn="ctr"/>
+            <a:endParaRPr/>
           </a:p>
         </p:txBody>
       </p:sp>
@@ -8734,6 +10932,7 @@
           <a:lstStyle/>
           <a:p>
             <a:pPr algn="ctr"/>
+            <a:endParaRPr/>
           </a:p>
         </p:txBody>
       </p:sp>
@@ -8847,6 +11046,7 @@
           <a:lstStyle/>
           <a:p>
             <a:pPr algn="ctr"/>
+            <a:endParaRPr/>
           </a:p>
         </p:txBody>
       </p:sp>
@@ -8890,6 +11090,7 @@
           <a:lstStyle/>
           <a:p>
             <a:pPr algn="ctr"/>
+            <a:endParaRPr/>
           </a:p>
         </p:txBody>
       </p:sp>
@@ -9003,6 +11204,7 @@
           <a:lstStyle/>
           <a:p>
             <a:pPr algn="ctr"/>
+            <a:endParaRPr/>
           </a:p>
         </p:txBody>
       </p:sp>
@@ -9046,6 +11248,7 @@
           <a:lstStyle/>
           <a:p>
             <a:pPr algn="ctr"/>
+            <a:endParaRPr/>
           </a:p>
         </p:txBody>
       </p:sp>
@@ -9159,6 +11362,7 @@
           <a:lstStyle/>
           <a:p>
             <a:pPr algn="ctr"/>
+            <a:endParaRPr/>
           </a:p>
         </p:txBody>
       </p:sp>
@@ -9202,6 +11406,7 @@
           <a:lstStyle/>
           <a:p>
             <a:pPr algn="ctr"/>
+            <a:endParaRPr/>
           </a:p>
         </p:txBody>
       </p:sp>
